--- a/Telemetry/Logging Hero.pptx
+++ b/Telemetry/Logging Hero.pptx
@@ -255,7 +255,7 @@
           <a:p>
             <a:fld id="{574E8BCA-0B4F-4373-B78E-3D2899449797}" type="datetimeFigureOut">
               <a:rPr lang="en-US" smtClean="0"/>
-              <a:t>5/12/2025</a:t>
+              <a:t>9/7/2026</a:t>
             </a:fld>
             <a:endParaRPr lang="en-US" dirty="0"/>
           </a:p>
@@ -5652,7 +5652,7 @@
         </p:blipFill>
         <p:spPr>
           <a:xfrm>
-            <a:off x="40079" y="2193343"/>
+            <a:off x="-2632895" y="6376643"/>
             <a:ext cx="12111841" cy="3088191"/>
           </a:xfrm>
           <a:prstGeom prst="rect">
@@ -5689,7 +5689,7 @@
         </p:blipFill>
         <p:spPr bwMode="auto">
           <a:xfrm>
-            <a:off x="8857510" y="4377690"/>
+            <a:off x="1434847" y="3754278"/>
             <a:ext cx="3065252" cy="2301240"/>
           </a:xfrm>
           <a:prstGeom prst="rect">
@@ -5707,6 +5707,1039 @@
           </a:extLst>
         </p:spPr>
       </p:pic>
+      <p:sp>
+        <p:nvSpPr>
+          <p:cNvPr id="2" name="Rectangle 1">
+            <a:extLst>
+              <a:ext uri="{FF2B5EF4-FFF2-40B4-BE49-F238E27FC236}">
+                <a16:creationId xmlns:a16="http://schemas.microsoft.com/office/drawing/2014/main" id="{DD2AFF11-46EA-2F87-DFF2-0FB3D1C0BEC2}"/>
+              </a:ext>
+            </a:extLst>
+          </p:cNvPr>
+          <p:cNvSpPr/>
+          <p:nvPr/>
+        </p:nvSpPr>
+        <p:spPr bwMode="auto">
+          <a:xfrm>
+            <a:off x="269239" y="2461516"/>
+            <a:ext cx="2331217" cy="632737"/>
+          </a:xfrm>
+          <a:prstGeom prst="rect">
+            <a:avLst/>
+          </a:prstGeom>
+          <a:ln>
+            <a:noFill/>
+            <a:headEnd type="none" w="med" len="med"/>
+            <a:tailEnd type="none" w="med" len="med"/>
+          </a:ln>
+        </p:spPr>
+        <p:style>
+          <a:lnRef idx="2">
+            <a:schemeClr val="accent1">
+              <a:shade val="50000"/>
+            </a:schemeClr>
+          </a:lnRef>
+          <a:fillRef idx="1">
+            <a:schemeClr val="accent1"/>
+          </a:fillRef>
+          <a:effectRef idx="0">
+            <a:schemeClr val="accent1"/>
+          </a:effectRef>
+          <a:fontRef idx="minor">
+            <a:schemeClr val="lt1"/>
+          </a:fontRef>
+        </p:style>
+        <p:txBody>
+          <a:bodyPr vert="horz" wrap="square" lIns="0" tIns="46637" rIns="0" bIns="46637" numCol="1" rtlCol="0" anchor="ctr" anchorCtr="0" compatLnSpc="1">
+            <a:prstTxWarp prst="textNoShape">
+              <a:avLst/>
+            </a:prstTxWarp>
+          </a:bodyPr>
+          <a:lstStyle/>
+          <a:p>
+            <a:pPr algn="ctr" defTabSz="932472" fontAlgn="base">
+              <a:spcBef>
+                <a:spcPct val="0"/>
+              </a:spcBef>
+              <a:spcAft>
+                <a:spcPct val="0"/>
+              </a:spcAft>
+            </a:pPr>
+            <a:r>
+              <a:rPr lang="en-US" sz="2000" dirty="0">
+                <a:gradFill>
+                  <a:gsLst>
+                    <a:gs pos="0">
+                      <a:srgbClr val="FFFFFF"/>
+                    </a:gs>
+                    <a:gs pos="100000">
+                      <a:srgbClr val="FFFFFF"/>
+                    </a:gs>
+                  </a:gsLst>
+                  <a:lin ang="5400000" scaled="0"/>
+                </a:gradFill>
+              </a:rPr>
+              <a:t>OTLP endpoint</a:t>
+            </a:r>
+          </a:p>
+        </p:txBody>
+      </p:sp>
+      <p:sp>
+        <p:nvSpPr>
+          <p:cNvPr id="6" name="Rectangle 5">
+            <a:extLst>
+              <a:ext uri="{FF2B5EF4-FFF2-40B4-BE49-F238E27FC236}">
+                <a16:creationId xmlns:a16="http://schemas.microsoft.com/office/drawing/2014/main" id="{3AEE981B-7BD6-6080-3EEF-199177BBC3C5}"/>
+              </a:ext>
+            </a:extLst>
+          </p:cNvPr>
+          <p:cNvSpPr/>
+          <p:nvPr/>
+        </p:nvSpPr>
+        <p:spPr bwMode="auto">
+          <a:xfrm>
+            <a:off x="3064356" y="2461516"/>
+            <a:ext cx="2331217" cy="632737"/>
+          </a:xfrm>
+          <a:prstGeom prst="rect">
+            <a:avLst/>
+          </a:prstGeom>
+          <a:ln>
+            <a:noFill/>
+            <a:headEnd type="none" w="med" len="med"/>
+            <a:tailEnd type="none" w="med" len="med"/>
+          </a:ln>
+        </p:spPr>
+        <p:style>
+          <a:lnRef idx="2">
+            <a:schemeClr val="accent1">
+              <a:shade val="50000"/>
+            </a:schemeClr>
+          </a:lnRef>
+          <a:fillRef idx="1">
+            <a:schemeClr val="accent1"/>
+          </a:fillRef>
+          <a:effectRef idx="0">
+            <a:schemeClr val="accent1"/>
+          </a:effectRef>
+          <a:fontRef idx="minor">
+            <a:schemeClr val="lt1"/>
+          </a:fontRef>
+        </p:style>
+        <p:txBody>
+          <a:bodyPr vert="horz" wrap="square" lIns="0" tIns="46637" rIns="0" bIns="46637" numCol="1" rtlCol="0" anchor="ctr" anchorCtr="0" compatLnSpc="1">
+            <a:prstTxWarp prst="textNoShape">
+              <a:avLst/>
+            </a:prstTxWarp>
+          </a:bodyPr>
+          <a:lstStyle/>
+          <a:p>
+            <a:pPr algn="ctr" defTabSz="932472" fontAlgn="base">
+              <a:spcBef>
+                <a:spcPct val="0"/>
+              </a:spcBef>
+              <a:spcAft>
+                <a:spcPct val="0"/>
+              </a:spcAft>
+            </a:pPr>
+            <a:r>
+              <a:rPr lang="en-US" sz="2000" dirty="0">
+                <a:gradFill>
+                  <a:gsLst>
+                    <a:gs pos="0">
+                      <a:srgbClr val="FFFFFF"/>
+                    </a:gs>
+                    <a:gs pos="100000">
+                      <a:srgbClr val="FFFFFF"/>
+                    </a:gs>
+                  </a:gsLst>
+                  <a:lin ang="5400000" scaled="0"/>
+                </a:gradFill>
+              </a:rPr>
+              <a:t>OTEL Collector</a:t>
+            </a:r>
+          </a:p>
+        </p:txBody>
+      </p:sp>
+      <p:sp>
+        <p:nvSpPr>
+          <p:cNvPr id="9" name="Rectangle 8">
+            <a:extLst>
+              <a:ext uri="{FF2B5EF4-FFF2-40B4-BE49-F238E27FC236}">
+                <a16:creationId xmlns:a16="http://schemas.microsoft.com/office/drawing/2014/main" id="{EF5C5986-5142-81D8-A07A-3B0C6542FB44}"/>
+              </a:ext>
+            </a:extLst>
+          </p:cNvPr>
+          <p:cNvSpPr/>
+          <p:nvPr/>
+        </p:nvSpPr>
+        <p:spPr bwMode="auto">
+          <a:xfrm>
+            <a:off x="6482635" y="2210637"/>
+            <a:ext cx="2331217" cy="395426"/>
+          </a:xfrm>
+          <a:prstGeom prst="rect">
+            <a:avLst/>
+          </a:prstGeom>
+          <a:ln>
+            <a:noFill/>
+            <a:headEnd type="none" w="med" len="med"/>
+            <a:tailEnd type="none" w="med" len="med"/>
+          </a:ln>
+        </p:spPr>
+        <p:style>
+          <a:lnRef idx="2">
+            <a:schemeClr val="accent1">
+              <a:shade val="50000"/>
+            </a:schemeClr>
+          </a:lnRef>
+          <a:fillRef idx="1">
+            <a:schemeClr val="accent1"/>
+          </a:fillRef>
+          <a:effectRef idx="0">
+            <a:schemeClr val="accent1"/>
+          </a:effectRef>
+          <a:fontRef idx="minor">
+            <a:schemeClr val="lt1"/>
+          </a:fontRef>
+        </p:style>
+        <p:txBody>
+          <a:bodyPr vert="horz" wrap="square" lIns="0" tIns="46637" rIns="0" bIns="46637" numCol="1" rtlCol="0" anchor="ctr" anchorCtr="0" compatLnSpc="1">
+            <a:prstTxWarp prst="textNoShape">
+              <a:avLst/>
+            </a:prstTxWarp>
+          </a:bodyPr>
+          <a:lstStyle/>
+          <a:p>
+            <a:pPr algn="ctr" defTabSz="932472" fontAlgn="base">
+              <a:spcBef>
+                <a:spcPct val="0"/>
+              </a:spcBef>
+              <a:spcAft>
+                <a:spcPct val="0"/>
+              </a:spcAft>
+            </a:pPr>
+            <a:r>
+              <a:rPr lang="en-US" sz="2000" dirty="0">
+                <a:gradFill>
+                  <a:gsLst>
+                    <a:gs pos="0">
+                      <a:srgbClr val="FFFFFF"/>
+                    </a:gs>
+                    <a:gs pos="100000">
+                      <a:srgbClr val="FFFFFF"/>
+                    </a:gs>
+                  </a:gsLst>
+                  <a:lin ang="5400000" scaled="0"/>
+                </a:gradFill>
+              </a:rPr>
+              <a:t>Seq</a:t>
+            </a:r>
+          </a:p>
+        </p:txBody>
+      </p:sp>
+      <p:sp>
+        <p:nvSpPr>
+          <p:cNvPr id="11" name="Rectangle 10">
+            <a:extLst>
+              <a:ext uri="{FF2B5EF4-FFF2-40B4-BE49-F238E27FC236}">
+                <a16:creationId xmlns:a16="http://schemas.microsoft.com/office/drawing/2014/main" id="{0D914A86-79D1-1769-DE0B-9AB0163A2D8C}"/>
+              </a:ext>
+            </a:extLst>
+          </p:cNvPr>
+          <p:cNvSpPr/>
+          <p:nvPr/>
+        </p:nvSpPr>
+        <p:spPr bwMode="auto">
+          <a:xfrm>
+            <a:off x="6487772" y="2706188"/>
+            <a:ext cx="2331217" cy="395426"/>
+          </a:xfrm>
+          <a:prstGeom prst="rect">
+            <a:avLst/>
+          </a:prstGeom>
+          <a:ln>
+            <a:noFill/>
+            <a:headEnd type="none" w="med" len="med"/>
+            <a:tailEnd type="none" w="med" len="med"/>
+          </a:ln>
+        </p:spPr>
+        <p:style>
+          <a:lnRef idx="2">
+            <a:schemeClr val="accent1">
+              <a:shade val="50000"/>
+            </a:schemeClr>
+          </a:lnRef>
+          <a:fillRef idx="1">
+            <a:schemeClr val="accent1"/>
+          </a:fillRef>
+          <a:effectRef idx="0">
+            <a:schemeClr val="accent1"/>
+          </a:effectRef>
+          <a:fontRef idx="minor">
+            <a:schemeClr val="lt1"/>
+          </a:fontRef>
+        </p:style>
+        <p:txBody>
+          <a:bodyPr vert="horz" wrap="square" lIns="0" tIns="46637" rIns="0" bIns="46637" numCol="1" rtlCol="0" anchor="ctr" anchorCtr="0" compatLnSpc="1">
+            <a:prstTxWarp prst="textNoShape">
+              <a:avLst/>
+            </a:prstTxWarp>
+          </a:bodyPr>
+          <a:lstStyle/>
+          <a:p>
+            <a:pPr algn="ctr" defTabSz="932472" fontAlgn="base">
+              <a:spcBef>
+                <a:spcPct val="0"/>
+              </a:spcBef>
+              <a:spcAft>
+                <a:spcPct val="0"/>
+              </a:spcAft>
+            </a:pPr>
+            <a:r>
+              <a:rPr lang="en-US" sz="2000" dirty="0">
+                <a:gradFill>
+                  <a:gsLst>
+                    <a:gs pos="0">
+                      <a:srgbClr val="FFFFFF"/>
+                    </a:gs>
+                    <a:gs pos="100000">
+                      <a:srgbClr val="FFFFFF"/>
+                    </a:gs>
+                  </a:gsLst>
+                  <a:lin ang="5400000" scaled="0"/>
+                </a:gradFill>
+              </a:rPr>
+              <a:t>Aspire</a:t>
+            </a:r>
+          </a:p>
+        </p:txBody>
+      </p:sp>
+      <p:sp>
+        <p:nvSpPr>
+          <p:cNvPr id="13" name="Rectangle 12">
+            <a:extLst>
+              <a:ext uri="{FF2B5EF4-FFF2-40B4-BE49-F238E27FC236}">
+                <a16:creationId xmlns:a16="http://schemas.microsoft.com/office/drawing/2014/main" id="{387F89A1-102E-E70A-2D74-9A852E23DD32}"/>
+              </a:ext>
+            </a:extLst>
+          </p:cNvPr>
+          <p:cNvSpPr/>
+          <p:nvPr/>
+        </p:nvSpPr>
+        <p:spPr bwMode="auto">
+          <a:xfrm>
+            <a:off x="6482633" y="3205682"/>
+            <a:ext cx="2331217" cy="395426"/>
+          </a:xfrm>
+          <a:prstGeom prst="rect">
+            <a:avLst/>
+          </a:prstGeom>
+          <a:ln>
+            <a:noFill/>
+            <a:headEnd type="none" w="med" len="med"/>
+            <a:tailEnd type="none" w="med" len="med"/>
+          </a:ln>
+        </p:spPr>
+        <p:style>
+          <a:lnRef idx="2">
+            <a:schemeClr val="accent1">
+              <a:shade val="50000"/>
+            </a:schemeClr>
+          </a:lnRef>
+          <a:fillRef idx="1">
+            <a:schemeClr val="accent1"/>
+          </a:fillRef>
+          <a:effectRef idx="0">
+            <a:schemeClr val="accent1"/>
+          </a:effectRef>
+          <a:fontRef idx="minor">
+            <a:schemeClr val="lt1"/>
+          </a:fontRef>
+        </p:style>
+        <p:txBody>
+          <a:bodyPr vert="horz" wrap="square" lIns="0" tIns="46637" rIns="0" bIns="46637" numCol="1" rtlCol="0" anchor="ctr" anchorCtr="0" compatLnSpc="1">
+            <a:prstTxWarp prst="textNoShape">
+              <a:avLst/>
+            </a:prstTxWarp>
+          </a:bodyPr>
+          <a:lstStyle/>
+          <a:p>
+            <a:pPr algn="ctr" defTabSz="932472" fontAlgn="base">
+              <a:spcBef>
+                <a:spcPct val="0"/>
+              </a:spcBef>
+              <a:spcAft>
+                <a:spcPct val="0"/>
+              </a:spcAft>
+            </a:pPr>
+            <a:r>
+              <a:rPr lang="en-US" sz="2000" dirty="0">
+                <a:gradFill>
+                  <a:gsLst>
+                    <a:gs pos="0">
+                      <a:srgbClr val="FFFFFF"/>
+                    </a:gs>
+                    <a:gs pos="100000">
+                      <a:srgbClr val="FFFFFF"/>
+                    </a:gs>
+                  </a:gsLst>
+                  <a:lin ang="5400000" scaled="0"/>
+                </a:gradFill>
+              </a:rPr>
+              <a:t>Zipkin</a:t>
+            </a:r>
+          </a:p>
+        </p:txBody>
+      </p:sp>
+      <p:sp>
+        <p:nvSpPr>
+          <p:cNvPr id="15" name="Rectangle 14">
+            <a:extLst>
+              <a:ext uri="{FF2B5EF4-FFF2-40B4-BE49-F238E27FC236}">
+                <a16:creationId xmlns:a16="http://schemas.microsoft.com/office/drawing/2014/main" id="{09CA341E-713A-9D2E-A7CB-227C5636B491}"/>
+              </a:ext>
+            </a:extLst>
+          </p:cNvPr>
+          <p:cNvSpPr/>
+          <p:nvPr/>
+        </p:nvSpPr>
+        <p:spPr bwMode="auto">
+          <a:xfrm>
+            <a:off x="6482632" y="3696553"/>
+            <a:ext cx="2331217" cy="395426"/>
+          </a:xfrm>
+          <a:prstGeom prst="rect">
+            <a:avLst/>
+          </a:prstGeom>
+          <a:ln>
+            <a:noFill/>
+            <a:headEnd type="none" w="med" len="med"/>
+            <a:tailEnd type="none" w="med" len="med"/>
+          </a:ln>
+        </p:spPr>
+        <p:style>
+          <a:lnRef idx="2">
+            <a:schemeClr val="accent1">
+              <a:shade val="50000"/>
+            </a:schemeClr>
+          </a:lnRef>
+          <a:fillRef idx="1">
+            <a:schemeClr val="accent1"/>
+          </a:fillRef>
+          <a:effectRef idx="0">
+            <a:schemeClr val="accent1"/>
+          </a:effectRef>
+          <a:fontRef idx="minor">
+            <a:schemeClr val="lt1"/>
+          </a:fontRef>
+        </p:style>
+        <p:txBody>
+          <a:bodyPr vert="horz" wrap="square" lIns="0" tIns="46637" rIns="0" bIns="46637" numCol="1" rtlCol="0" anchor="ctr" anchorCtr="0" compatLnSpc="1">
+            <a:prstTxWarp prst="textNoShape">
+              <a:avLst/>
+            </a:prstTxWarp>
+          </a:bodyPr>
+          <a:lstStyle/>
+          <a:p>
+            <a:pPr algn="ctr" defTabSz="932472" fontAlgn="base">
+              <a:spcBef>
+                <a:spcPct val="0"/>
+              </a:spcBef>
+              <a:spcAft>
+                <a:spcPct val="0"/>
+              </a:spcAft>
+            </a:pPr>
+            <a:r>
+              <a:rPr lang="en-US" sz="2000" dirty="0">
+                <a:gradFill>
+                  <a:gsLst>
+                    <a:gs pos="0">
+                      <a:srgbClr val="FFFFFF"/>
+                    </a:gs>
+                    <a:gs pos="100000">
+                      <a:srgbClr val="FFFFFF"/>
+                    </a:gs>
+                  </a:gsLst>
+                  <a:lin ang="5400000" scaled="0"/>
+                </a:gradFill>
+              </a:rPr>
+              <a:t>Prometheus</a:t>
+            </a:r>
+          </a:p>
+        </p:txBody>
+      </p:sp>
+      <p:sp>
+        <p:nvSpPr>
+          <p:cNvPr id="17" name="Rectangle 16">
+            <a:extLst>
+              <a:ext uri="{FF2B5EF4-FFF2-40B4-BE49-F238E27FC236}">
+                <a16:creationId xmlns:a16="http://schemas.microsoft.com/office/drawing/2014/main" id="{C1C391F2-A9A2-CE1A-C7D2-D0C8D1D5E82F}"/>
+              </a:ext>
+            </a:extLst>
+          </p:cNvPr>
+          <p:cNvSpPr/>
+          <p:nvPr/>
+        </p:nvSpPr>
+        <p:spPr bwMode="auto">
+          <a:xfrm>
+            <a:off x="9408607" y="3696554"/>
+            <a:ext cx="2331217" cy="395426"/>
+          </a:xfrm>
+          <a:prstGeom prst="rect">
+            <a:avLst/>
+          </a:prstGeom>
+          <a:ln>
+            <a:noFill/>
+            <a:headEnd type="none" w="med" len="med"/>
+            <a:tailEnd type="none" w="med" len="med"/>
+          </a:ln>
+        </p:spPr>
+        <p:style>
+          <a:lnRef idx="2">
+            <a:schemeClr val="accent1">
+              <a:shade val="50000"/>
+            </a:schemeClr>
+          </a:lnRef>
+          <a:fillRef idx="1">
+            <a:schemeClr val="accent1"/>
+          </a:fillRef>
+          <a:effectRef idx="0">
+            <a:schemeClr val="accent1"/>
+          </a:effectRef>
+          <a:fontRef idx="minor">
+            <a:schemeClr val="lt1"/>
+          </a:fontRef>
+        </p:style>
+        <p:txBody>
+          <a:bodyPr vert="horz" wrap="square" lIns="0" tIns="46637" rIns="0" bIns="46637" numCol="1" rtlCol="0" anchor="ctr" anchorCtr="0" compatLnSpc="1">
+            <a:prstTxWarp prst="textNoShape">
+              <a:avLst/>
+            </a:prstTxWarp>
+          </a:bodyPr>
+          <a:lstStyle/>
+          <a:p>
+            <a:pPr algn="ctr" defTabSz="932472" fontAlgn="base">
+              <a:spcBef>
+                <a:spcPct val="0"/>
+              </a:spcBef>
+              <a:spcAft>
+                <a:spcPct val="0"/>
+              </a:spcAft>
+            </a:pPr>
+            <a:r>
+              <a:rPr lang="en-US" sz="2000" dirty="0">
+                <a:gradFill>
+                  <a:gsLst>
+                    <a:gs pos="0">
+                      <a:srgbClr val="FFFFFF"/>
+                    </a:gs>
+                    <a:gs pos="100000">
+                      <a:srgbClr val="FFFFFF"/>
+                    </a:gs>
+                  </a:gsLst>
+                  <a:lin ang="5400000" scaled="0"/>
+                </a:gradFill>
+              </a:rPr>
+              <a:t>Grafana</a:t>
+            </a:r>
+          </a:p>
+        </p:txBody>
+      </p:sp>
+      <p:sp>
+        <p:nvSpPr>
+          <p:cNvPr id="19" name="Rectangle 18">
+            <a:extLst>
+              <a:ext uri="{FF2B5EF4-FFF2-40B4-BE49-F238E27FC236}">
+                <a16:creationId xmlns:a16="http://schemas.microsoft.com/office/drawing/2014/main" id="{F97764E4-56E3-68C1-B902-57C3B77073AE}"/>
+              </a:ext>
+            </a:extLst>
+          </p:cNvPr>
+          <p:cNvSpPr/>
+          <p:nvPr/>
+        </p:nvSpPr>
+        <p:spPr bwMode="auto">
+          <a:xfrm>
+            <a:off x="6482631" y="4170572"/>
+            <a:ext cx="2331217" cy="395426"/>
+          </a:xfrm>
+          <a:prstGeom prst="rect">
+            <a:avLst/>
+          </a:prstGeom>
+          <a:ln>
+            <a:noFill/>
+            <a:headEnd type="none" w="med" len="med"/>
+            <a:tailEnd type="none" w="med" len="med"/>
+          </a:ln>
+        </p:spPr>
+        <p:style>
+          <a:lnRef idx="2">
+            <a:schemeClr val="accent1">
+              <a:shade val="50000"/>
+            </a:schemeClr>
+          </a:lnRef>
+          <a:fillRef idx="1">
+            <a:schemeClr val="accent1"/>
+          </a:fillRef>
+          <a:effectRef idx="0">
+            <a:schemeClr val="accent1"/>
+          </a:effectRef>
+          <a:fontRef idx="minor">
+            <a:schemeClr val="lt1"/>
+          </a:fontRef>
+        </p:style>
+        <p:txBody>
+          <a:bodyPr vert="horz" wrap="square" lIns="0" tIns="46637" rIns="0" bIns="46637" numCol="1" rtlCol="0" anchor="ctr" anchorCtr="0" compatLnSpc="1">
+            <a:prstTxWarp prst="textNoShape">
+              <a:avLst/>
+            </a:prstTxWarp>
+          </a:bodyPr>
+          <a:lstStyle/>
+          <a:p>
+            <a:pPr algn="ctr" defTabSz="932472" fontAlgn="base">
+              <a:spcBef>
+                <a:spcPct val="0"/>
+              </a:spcBef>
+              <a:spcAft>
+                <a:spcPct val="0"/>
+              </a:spcAft>
+            </a:pPr>
+            <a:r>
+              <a:rPr lang="en-US" sz="2000" dirty="0">
+                <a:gradFill>
+                  <a:gsLst>
+                    <a:gs pos="0">
+                      <a:srgbClr val="FFFFFF"/>
+                    </a:gs>
+                    <a:gs pos="100000">
+                      <a:srgbClr val="FFFFFF"/>
+                    </a:gs>
+                  </a:gsLst>
+                  <a:lin ang="5400000" scaled="0"/>
+                </a:gradFill>
+              </a:rPr>
+              <a:t>Jaeger</a:t>
+            </a:r>
+          </a:p>
+        </p:txBody>
+      </p:sp>
+      <p:sp>
+        <p:nvSpPr>
+          <p:cNvPr id="21" name="Rectangle 20">
+            <a:extLst>
+              <a:ext uri="{FF2B5EF4-FFF2-40B4-BE49-F238E27FC236}">
+                <a16:creationId xmlns:a16="http://schemas.microsoft.com/office/drawing/2014/main" id="{2BCA6A0A-72F1-90B4-F012-85F5DB6C6F57}"/>
+              </a:ext>
+            </a:extLst>
+          </p:cNvPr>
+          <p:cNvSpPr/>
+          <p:nvPr/>
+        </p:nvSpPr>
+        <p:spPr bwMode="auto">
+          <a:xfrm>
+            <a:off x="6482630" y="5062548"/>
+            <a:ext cx="2331217" cy="395426"/>
+          </a:xfrm>
+          <a:prstGeom prst="rect">
+            <a:avLst/>
+          </a:prstGeom>
+          <a:ln>
+            <a:headEnd type="none" w="med" len="med"/>
+            <a:tailEnd type="none" w="med" len="med"/>
+          </a:ln>
+        </p:spPr>
+        <p:style>
+          <a:lnRef idx="2">
+            <a:schemeClr val="accent6"/>
+          </a:lnRef>
+          <a:fillRef idx="1">
+            <a:schemeClr val="lt1"/>
+          </a:fillRef>
+          <a:effectRef idx="0">
+            <a:schemeClr val="accent6"/>
+          </a:effectRef>
+          <a:fontRef idx="minor">
+            <a:schemeClr val="dk1"/>
+          </a:fontRef>
+        </p:style>
+        <p:txBody>
+          <a:bodyPr vert="horz" wrap="square" lIns="0" tIns="46637" rIns="0" bIns="46637" numCol="1" rtlCol="0" anchor="ctr" anchorCtr="0" compatLnSpc="1">
+            <a:prstTxWarp prst="textNoShape">
+              <a:avLst/>
+            </a:prstTxWarp>
+          </a:bodyPr>
+          <a:lstStyle/>
+          <a:p>
+            <a:pPr algn="ctr" defTabSz="932472" fontAlgn="base">
+              <a:spcBef>
+                <a:spcPct val="0"/>
+              </a:spcBef>
+              <a:spcAft>
+                <a:spcPct val="0"/>
+              </a:spcAft>
+            </a:pPr>
+            <a:r>
+              <a:rPr lang="en-US" sz="2000" dirty="0">
+                <a:solidFill>
+                  <a:schemeClr val="bg1"/>
+                </a:solidFill>
+              </a:rPr>
+              <a:t>Honeycomb</a:t>
+            </a:r>
+          </a:p>
+        </p:txBody>
+      </p:sp>
+      <p:cxnSp>
+        <p:nvCxnSpPr>
+          <p:cNvPr id="23" name="Straight Arrow Connector 22">
+            <a:extLst>
+              <a:ext uri="{FF2B5EF4-FFF2-40B4-BE49-F238E27FC236}">
+                <a16:creationId xmlns:a16="http://schemas.microsoft.com/office/drawing/2014/main" id="{9C0D9FBA-20AE-338B-CE9B-AD8764124D80}"/>
+              </a:ext>
+            </a:extLst>
+          </p:cNvPr>
+          <p:cNvCxnSpPr>
+            <a:stCxn id="2" idx="3"/>
+            <a:endCxn id="6" idx="1"/>
+          </p:cNvCxnSpPr>
+          <p:nvPr/>
+        </p:nvCxnSpPr>
+        <p:spPr>
+          <a:xfrm>
+            <a:off x="2600456" y="2777885"/>
+            <a:ext cx="463900" cy="0"/>
+          </a:xfrm>
+          <a:prstGeom prst="straightConnector1">
+            <a:avLst/>
+          </a:prstGeom>
+          <a:ln>
+            <a:headEnd type="none"/>
+            <a:tailEnd type="triangle"/>
+          </a:ln>
+        </p:spPr>
+        <p:style>
+          <a:lnRef idx="1">
+            <a:schemeClr val="dk1"/>
+          </a:lnRef>
+          <a:fillRef idx="0">
+            <a:schemeClr val="dk1"/>
+          </a:fillRef>
+          <a:effectRef idx="0">
+            <a:schemeClr val="dk1"/>
+          </a:effectRef>
+          <a:fontRef idx="minor">
+            <a:schemeClr val="tx1"/>
+          </a:fontRef>
+        </p:style>
+      </p:cxnSp>
+      <p:cxnSp>
+        <p:nvCxnSpPr>
+          <p:cNvPr id="24" name="Straight Arrow Connector 23">
+            <a:extLst>
+              <a:ext uri="{FF2B5EF4-FFF2-40B4-BE49-F238E27FC236}">
+                <a16:creationId xmlns:a16="http://schemas.microsoft.com/office/drawing/2014/main" id="{57CE0FEB-0E0C-C326-C0EE-CD450B989056}"/>
+              </a:ext>
+            </a:extLst>
+          </p:cNvPr>
+          <p:cNvCxnSpPr>
+            <a:cxnSpLocks/>
+            <a:stCxn id="6" idx="3"/>
+            <a:endCxn id="9" idx="1"/>
+          </p:cNvCxnSpPr>
+          <p:nvPr/>
+        </p:nvCxnSpPr>
+        <p:spPr>
+          <a:xfrm flipV="1">
+            <a:off x="5395573" y="2408350"/>
+            <a:ext cx="1087062" cy="369535"/>
+          </a:xfrm>
+          <a:prstGeom prst="straightConnector1">
+            <a:avLst/>
+          </a:prstGeom>
+          <a:ln>
+            <a:headEnd type="none"/>
+            <a:tailEnd type="triangle"/>
+          </a:ln>
+        </p:spPr>
+        <p:style>
+          <a:lnRef idx="1">
+            <a:schemeClr val="dk1"/>
+          </a:lnRef>
+          <a:fillRef idx="0">
+            <a:schemeClr val="dk1"/>
+          </a:fillRef>
+          <a:effectRef idx="0">
+            <a:schemeClr val="dk1"/>
+          </a:effectRef>
+          <a:fontRef idx="minor">
+            <a:schemeClr val="tx1"/>
+          </a:fontRef>
+        </p:style>
+      </p:cxnSp>
+      <p:cxnSp>
+        <p:nvCxnSpPr>
+          <p:cNvPr id="27" name="Straight Arrow Connector 26">
+            <a:extLst>
+              <a:ext uri="{FF2B5EF4-FFF2-40B4-BE49-F238E27FC236}">
+                <a16:creationId xmlns:a16="http://schemas.microsoft.com/office/drawing/2014/main" id="{953467D8-E06F-10F4-8723-492AAC3247BD}"/>
+              </a:ext>
+            </a:extLst>
+          </p:cNvPr>
+          <p:cNvCxnSpPr>
+            <a:cxnSpLocks/>
+            <a:stCxn id="6" idx="3"/>
+            <a:endCxn id="11" idx="1"/>
+          </p:cNvCxnSpPr>
+          <p:nvPr/>
+        </p:nvCxnSpPr>
+        <p:spPr>
+          <a:xfrm>
+            <a:off x="5395573" y="2777885"/>
+            <a:ext cx="1092199" cy="126016"/>
+          </a:xfrm>
+          <a:prstGeom prst="straightConnector1">
+            <a:avLst/>
+          </a:prstGeom>
+          <a:ln>
+            <a:headEnd type="none"/>
+            <a:tailEnd type="triangle"/>
+          </a:ln>
+        </p:spPr>
+        <p:style>
+          <a:lnRef idx="1">
+            <a:schemeClr val="dk1"/>
+          </a:lnRef>
+          <a:fillRef idx="0">
+            <a:schemeClr val="dk1"/>
+          </a:fillRef>
+          <a:effectRef idx="0">
+            <a:schemeClr val="dk1"/>
+          </a:effectRef>
+          <a:fontRef idx="minor">
+            <a:schemeClr val="tx1"/>
+          </a:fontRef>
+        </p:style>
+      </p:cxnSp>
+      <p:cxnSp>
+        <p:nvCxnSpPr>
+          <p:cNvPr id="30" name="Straight Arrow Connector 29">
+            <a:extLst>
+              <a:ext uri="{FF2B5EF4-FFF2-40B4-BE49-F238E27FC236}">
+                <a16:creationId xmlns:a16="http://schemas.microsoft.com/office/drawing/2014/main" id="{F9EE94AC-8531-591A-F718-268F2FFF34BF}"/>
+              </a:ext>
+            </a:extLst>
+          </p:cNvPr>
+          <p:cNvCxnSpPr>
+            <a:cxnSpLocks/>
+            <a:stCxn id="6" idx="3"/>
+            <a:endCxn id="13" idx="1"/>
+          </p:cNvCxnSpPr>
+          <p:nvPr/>
+        </p:nvCxnSpPr>
+        <p:spPr>
+          <a:xfrm>
+            <a:off x="5395573" y="2777885"/>
+            <a:ext cx="1087060" cy="625510"/>
+          </a:xfrm>
+          <a:prstGeom prst="straightConnector1">
+            <a:avLst/>
+          </a:prstGeom>
+          <a:ln>
+            <a:headEnd type="none"/>
+            <a:tailEnd type="triangle"/>
+          </a:ln>
+        </p:spPr>
+        <p:style>
+          <a:lnRef idx="1">
+            <a:schemeClr val="dk1"/>
+          </a:lnRef>
+          <a:fillRef idx="0">
+            <a:schemeClr val="dk1"/>
+          </a:fillRef>
+          <a:effectRef idx="0">
+            <a:schemeClr val="dk1"/>
+          </a:effectRef>
+          <a:fontRef idx="minor">
+            <a:schemeClr val="tx1"/>
+          </a:fontRef>
+        </p:style>
+      </p:cxnSp>
+      <p:cxnSp>
+        <p:nvCxnSpPr>
+          <p:cNvPr id="33" name="Straight Arrow Connector 32">
+            <a:extLst>
+              <a:ext uri="{FF2B5EF4-FFF2-40B4-BE49-F238E27FC236}">
+                <a16:creationId xmlns:a16="http://schemas.microsoft.com/office/drawing/2014/main" id="{24C009D1-D1CB-D718-2AD8-D0ECD147407B}"/>
+              </a:ext>
+            </a:extLst>
+          </p:cNvPr>
+          <p:cNvCxnSpPr>
+            <a:cxnSpLocks/>
+            <a:stCxn id="6" idx="3"/>
+            <a:endCxn id="15" idx="1"/>
+          </p:cNvCxnSpPr>
+          <p:nvPr/>
+        </p:nvCxnSpPr>
+        <p:spPr>
+          <a:xfrm>
+            <a:off x="5395573" y="2777885"/>
+            <a:ext cx="1087059" cy="1116381"/>
+          </a:xfrm>
+          <a:prstGeom prst="straightConnector1">
+            <a:avLst/>
+          </a:prstGeom>
+          <a:ln>
+            <a:headEnd type="none"/>
+            <a:tailEnd type="triangle"/>
+          </a:ln>
+        </p:spPr>
+        <p:style>
+          <a:lnRef idx="1">
+            <a:schemeClr val="dk1"/>
+          </a:lnRef>
+          <a:fillRef idx="0">
+            <a:schemeClr val="dk1"/>
+          </a:fillRef>
+          <a:effectRef idx="0">
+            <a:schemeClr val="dk1"/>
+          </a:effectRef>
+          <a:fontRef idx="minor">
+            <a:schemeClr val="tx1"/>
+          </a:fontRef>
+        </p:style>
+      </p:cxnSp>
+      <p:cxnSp>
+        <p:nvCxnSpPr>
+          <p:cNvPr id="36" name="Straight Arrow Connector 35">
+            <a:extLst>
+              <a:ext uri="{FF2B5EF4-FFF2-40B4-BE49-F238E27FC236}">
+                <a16:creationId xmlns:a16="http://schemas.microsoft.com/office/drawing/2014/main" id="{D225CFDD-4A2A-2AF4-D219-2EB6B6DF03F3}"/>
+              </a:ext>
+            </a:extLst>
+          </p:cNvPr>
+          <p:cNvCxnSpPr>
+            <a:cxnSpLocks/>
+            <a:stCxn id="6" idx="3"/>
+            <a:endCxn id="19" idx="1"/>
+          </p:cNvCxnSpPr>
+          <p:nvPr/>
+        </p:nvCxnSpPr>
+        <p:spPr>
+          <a:xfrm>
+            <a:off x="5395573" y="2777885"/>
+            <a:ext cx="1087058" cy="1590400"/>
+          </a:xfrm>
+          <a:prstGeom prst="straightConnector1">
+            <a:avLst/>
+          </a:prstGeom>
+          <a:ln>
+            <a:headEnd type="none"/>
+            <a:tailEnd type="triangle"/>
+          </a:ln>
+        </p:spPr>
+        <p:style>
+          <a:lnRef idx="1">
+            <a:schemeClr val="dk1"/>
+          </a:lnRef>
+          <a:fillRef idx="0">
+            <a:schemeClr val="dk1"/>
+          </a:fillRef>
+          <a:effectRef idx="0">
+            <a:schemeClr val="dk1"/>
+          </a:effectRef>
+          <a:fontRef idx="minor">
+            <a:schemeClr val="tx1"/>
+          </a:fontRef>
+        </p:style>
+      </p:cxnSp>
+      <p:cxnSp>
+        <p:nvCxnSpPr>
+          <p:cNvPr id="39" name="Straight Arrow Connector 38">
+            <a:extLst>
+              <a:ext uri="{FF2B5EF4-FFF2-40B4-BE49-F238E27FC236}">
+                <a16:creationId xmlns:a16="http://schemas.microsoft.com/office/drawing/2014/main" id="{57177C14-EF68-3470-0F74-8B3241084902}"/>
+              </a:ext>
+            </a:extLst>
+          </p:cNvPr>
+          <p:cNvCxnSpPr>
+            <a:cxnSpLocks/>
+            <a:stCxn id="6" idx="3"/>
+            <a:endCxn id="21" idx="1"/>
+          </p:cNvCxnSpPr>
+          <p:nvPr/>
+        </p:nvCxnSpPr>
+        <p:spPr>
+          <a:xfrm>
+            <a:off x="5395573" y="2777885"/>
+            <a:ext cx="1087057" cy="2482376"/>
+          </a:xfrm>
+          <a:prstGeom prst="straightConnector1">
+            <a:avLst/>
+          </a:prstGeom>
+          <a:ln>
+            <a:headEnd type="none"/>
+            <a:tailEnd type="triangle"/>
+          </a:ln>
+        </p:spPr>
+        <p:style>
+          <a:lnRef idx="1">
+            <a:schemeClr val="dk1"/>
+          </a:lnRef>
+          <a:fillRef idx="0">
+            <a:schemeClr val="dk1"/>
+          </a:fillRef>
+          <a:effectRef idx="0">
+            <a:schemeClr val="dk1"/>
+          </a:effectRef>
+          <a:fontRef idx="minor">
+            <a:schemeClr val="tx1"/>
+          </a:fontRef>
+        </p:style>
+      </p:cxnSp>
+      <p:cxnSp>
+        <p:nvCxnSpPr>
+          <p:cNvPr id="42" name="Straight Arrow Connector 41">
+            <a:extLst>
+              <a:ext uri="{FF2B5EF4-FFF2-40B4-BE49-F238E27FC236}">
+                <a16:creationId xmlns:a16="http://schemas.microsoft.com/office/drawing/2014/main" id="{6DA80E6E-7525-2451-8BAF-D5AA93EA02C4}"/>
+              </a:ext>
+            </a:extLst>
+          </p:cNvPr>
+          <p:cNvCxnSpPr>
+            <a:cxnSpLocks/>
+            <a:stCxn id="15" idx="3"/>
+            <a:endCxn id="17" idx="1"/>
+          </p:cNvCxnSpPr>
+          <p:nvPr/>
+        </p:nvCxnSpPr>
+        <p:spPr>
+          <a:xfrm>
+            <a:off x="8813849" y="3894266"/>
+            <a:ext cx="594758" cy="1"/>
+          </a:xfrm>
+          <a:prstGeom prst="straightConnector1">
+            <a:avLst/>
+          </a:prstGeom>
+          <a:ln>
+            <a:headEnd type="none"/>
+            <a:tailEnd type="triangle"/>
+          </a:ln>
+        </p:spPr>
+        <p:style>
+          <a:lnRef idx="1">
+            <a:schemeClr val="dk1"/>
+          </a:lnRef>
+          <a:fillRef idx="0">
+            <a:schemeClr val="dk1"/>
+          </a:fillRef>
+          <a:effectRef idx="0">
+            <a:schemeClr val="dk1"/>
+          </a:effectRef>
+          <a:fontRef idx="minor">
+            <a:schemeClr val="tx1"/>
+          </a:fontRef>
+        </p:style>
+      </p:cxnSp>
     </p:spTree>
     <p:extLst>
       <p:ext uri="{BB962C8B-B14F-4D97-AF65-F5344CB8AC3E}">
@@ -5757,7 +6790,7 @@
           <a:p>
             <a:r>
               <a:rPr lang="en-US" dirty="0"/>
-              <a:t>Demo: Telemetry the Easy Way</a:t>
+              <a:t>Demo 1: Telemetry the Easy Way</a:t>
             </a:r>
           </a:p>
         </p:txBody>
@@ -6518,7 +7551,7 @@
           <a:p>
             <a:r>
               <a:rPr lang="en-US" dirty="0"/>
-              <a:t>Demo: Basic Semantic Logging</a:t>
+              <a:t>Demo 2: Basic Semantic Logging</a:t>
             </a:r>
           </a:p>
         </p:txBody>
@@ -6680,12 +7713,8 @@
               <a:buChar char="-"/>
             </a:pPr>
             <a:r>
-              <a:rPr lang="en-US" dirty="0" err="1"/>
-              <a:t>Graylog</a:t>
-            </a:r>
-            <a:r>
-              <a:rPr lang="en-US" dirty="0"/>
-              <a:t> cloud</a:t>
+              <a:rPr lang="en-US" dirty="0"/>
+              <a:t>Honeycomb</a:t>
             </a:r>
           </a:p>
           <a:p>
@@ -6695,6 +7724,20 @@
             </a:pPr>
             <a:r>
               <a:rPr lang="en-US" dirty="0" err="1"/>
+              <a:t>Graylog</a:t>
+            </a:r>
+            <a:r>
+              <a:rPr lang="en-US" dirty="0"/>
+              <a:t> cloud</a:t>
+            </a:r>
+          </a:p>
+          <a:p>
+            <a:pPr marL="796926" lvl="1" indent="-457200">
+              <a:buFontTx/>
+              <a:buChar char="-"/>
+            </a:pPr>
+            <a:r>
+              <a:rPr lang="en-US" dirty="0" err="1"/>
               <a:t>Papertrail</a:t>
             </a:r>
             <a:endParaRPr lang="en-US" dirty="0"/>
@@ -6718,16 +7761,9 @@
               <a:rPr lang="en-US" dirty="0" err="1"/>
               <a:t>Graylog</a:t>
             </a:r>
-            <a:endParaRPr lang="en-US" dirty="0"/>
-          </a:p>
-          <a:p>
-            <a:pPr marL="796926" lvl="1" indent="-457200">
-              <a:buFontTx/>
-              <a:buChar char="-"/>
-            </a:pPr>
-            <a:r>
-              <a:rPr lang="en-US" dirty="0"/>
-              <a:t>Seq</a:t>
+            <a:r>
+              <a:rPr lang="en-US" dirty="0"/>
+              <a:t>, Seq</a:t>
             </a:r>
           </a:p>
         </p:txBody>
@@ -6796,7 +7832,7 @@
 </file>
 
 <file path=ppt/slides/slide18.xml><?xml version="1.0" encoding="utf-8"?>
-<p:sld xmlns:a="http://schemas.openxmlformats.org/drawingml/2006/main" xmlns:r="http://schemas.openxmlformats.org/officeDocument/2006/relationships" xmlns:p="http://schemas.openxmlformats.org/presentationml/2006/main">
+<p:sld xmlns:a="http://schemas.openxmlformats.org/drawingml/2006/main" xmlns:r="http://schemas.openxmlformats.org/officeDocument/2006/relationships" xmlns:p="http://schemas.openxmlformats.org/presentationml/2006/main" show="0">
   <p:cSld>
     <p:spTree>
       <p:nvGrpSpPr>
@@ -7668,7 +8704,7 @@
           <a:p>
             <a:r>
               <a:rPr lang="en-US" dirty="0"/>
-              <a:t>Demo: Scopes</a:t>
+              <a:t>Demo 3: Scopes</a:t>
             </a:r>
           </a:p>
         </p:txBody>
@@ -8062,7 +9098,7 @@
           <a:p>
             <a:r>
               <a:rPr lang="en-US" dirty="0"/>
-              <a:t>Demo: Scopes in the Real World</a:t>
+              <a:t>Demo 4: Scopes in the Real World</a:t>
             </a:r>
           </a:p>
         </p:txBody>
@@ -8415,7 +9451,7 @@
 </file>
 
 <file path=ppt/slides/slide3.xml><?xml version="1.0" encoding="utf-8"?>
-<p:sld xmlns:a="http://schemas.openxmlformats.org/drawingml/2006/main" xmlns:r="http://schemas.openxmlformats.org/officeDocument/2006/relationships" xmlns:p="http://schemas.openxmlformats.org/presentationml/2006/main" showMasterSp="0">
+<p:sld xmlns:a="http://schemas.openxmlformats.org/drawingml/2006/main" xmlns:r="http://schemas.openxmlformats.org/officeDocument/2006/relationships" xmlns:p="http://schemas.openxmlformats.org/presentationml/2006/main" showMasterSp="0" show="0">
   <p:cSld>
     <p:spTree>
       <p:nvGrpSpPr>
@@ -8476,11 +9512,11 @@
   <p:clrMapOvr>
     <a:masterClrMapping/>
   </p:clrMapOvr>
-  <mc:AlternateContent xmlns:mc="http://schemas.openxmlformats.org/markup-compatibility/2006" xmlns:p14="http://schemas.microsoft.com/office/powerpoint/2010/main">
-    <mc:Choice Requires="p14">
+  <mc:AlternateContent xmlns:mc="http://schemas.openxmlformats.org/markup-compatibility/2006">
+    <mc:Choice xmlns:p14="http://schemas.microsoft.com/office/powerpoint/2010/main" Requires="p14">
       <p:transition p14:dur="0"/>
     </mc:Choice>
-    <mc:Fallback xmlns="">
+    <mc:Fallback>
       <p:transition/>
     </mc:Fallback>
   </mc:AlternateContent>
@@ -8926,7 +9962,7 @@
         <p:spPr>
           <a:xfrm>
             <a:off x="269239" y="1197324"/>
-            <a:ext cx="11653523" cy="632737"/>
+            <a:ext cx="11653523" cy="2823337"/>
           </a:xfrm>
         </p:spPr>
         <p:txBody>
@@ -8939,38 +9975,63 @@
             </a:pPr>
             <a:endParaRPr lang="en-US" dirty="0"/>
           </a:p>
-        </p:txBody>
-      </p:sp>
-      <p:pic>
-        <p:nvPicPr>
-          <p:cNvPr id="11" name="Picture 10">
-            <a:extLst>
-              <a:ext uri="{FF2B5EF4-FFF2-40B4-BE49-F238E27FC236}">
-                <a16:creationId xmlns:a16="http://schemas.microsoft.com/office/drawing/2014/main" id="{F2220D5E-173D-67B7-07A2-3782210ACC4E}"/>
-              </a:ext>
-            </a:extLst>
-          </p:cNvPr>
-          <p:cNvPicPr>
-            <a:picLocks noChangeAspect="1"/>
-          </p:cNvPicPr>
-          <p:nvPr/>
-        </p:nvPicPr>
-        <p:blipFill>
-          <a:blip r:embed="rId2"/>
-          <a:stretch>
-            <a:fillRect/>
-          </a:stretch>
-        </p:blipFill>
-        <p:spPr>
-          <a:xfrm>
-            <a:off x="0" y="1875146"/>
-            <a:ext cx="12192000" cy="3107708"/>
-          </a:xfrm>
-          <a:prstGeom prst="rect">
-            <a:avLst/>
-          </a:prstGeom>
-        </p:spPr>
-      </p:pic>
+          <a:p>
+            <a:pPr marL="457200" indent="-457200">
+              <a:buFontTx/>
+              <a:buChar char="-"/>
+            </a:pPr>
+            <a:r>
+              <a:rPr lang="en-US" dirty="0"/>
+              <a:t>In the beginning, there were </a:t>
+            </a:r>
+            <a:r>
+              <a:rPr lang="en-US" dirty="0" err="1"/>
+              <a:t>PerformanceCounters</a:t>
+            </a:r>
+            <a:endParaRPr lang="en-US" dirty="0"/>
+          </a:p>
+          <a:p>
+            <a:pPr marL="457200" indent="-457200">
+              <a:buFontTx/>
+              <a:buChar char="-"/>
+            </a:pPr>
+            <a:r>
+              <a:rPr lang="en-US" dirty="0" err="1"/>
+              <a:t>PerformanceCounters</a:t>
+            </a:r>
+            <a:r>
+              <a:rPr lang="en-US" dirty="0"/>
+              <a:t> were replaced by </a:t>
+            </a:r>
+            <a:r>
+              <a:rPr lang="en-US" dirty="0" err="1"/>
+              <a:t>EventCounters</a:t>
+            </a:r>
+            <a:endParaRPr lang="en-US" dirty="0"/>
+          </a:p>
+          <a:p>
+            <a:pPr marL="457200" indent="-457200">
+              <a:buFontTx/>
+              <a:buChar char="-"/>
+            </a:pPr>
+            <a:r>
+              <a:rPr lang="en-US" dirty="0" err="1"/>
+              <a:t>EventCounters</a:t>
+            </a:r>
+            <a:r>
+              <a:rPr lang="en-US" dirty="0"/>
+              <a:t> are now replaced by OTEL Metrics</a:t>
+            </a:r>
+          </a:p>
+          <a:p>
+            <a:pPr marL="457200" indent="-457200">
+              <a:buFontTx/>
+              <a:buChar char="-"/>
+            </a:pPr>
+            <a:endParaRPr lang="en-US" dirty="0"/>
+          </a:p>
+        </p:txBody>
+      </p:sp>
       <p:pic>
         <p:nvPicPr>
           <p:cNvPr id="1028" name="Picture 4">
@@ -8986,7 +10047,7 @@
           <p:nvPr/>
         </p:nvPicPr>
         <p:blipFill>
-          <a:blip r:embed="rId3">
+          <a:blip r:embed="rId2">
             <a:extLst>
               <a:ext uri="{28A0092B-C50C-407E-A947-70E740481C1C}">
                 <a14:useLocalDpi xmlns:a14="http://schemas.microsoft.com/office/drawing/2010/main" val="0"/>
@@ -9000,7 +10061,7 @@
         </p:blipFill>
         <p:spPr bwMode="auto">
           <a:xfrm>
-            <a:off x="8597356" y="4151044"/>
+            <a:off x="4433297" y="3801723"/>
             <a:ext cx="3325406" cy="2417445"/>
           </a:xfrm>
           <a:prstGeom prst="rect">
@@ -9098,7 +10159,7 @@
         <p:spPr>
           <a:xfrm>
             <a:off x="269239" y="1197324"/>
-            <a:ext cx="11653523" cy="632737"/>
+            <a:ext cx="11653523" cy="3570080"/>
           </a:xfrm>
         </p:spPr>
         <p:txBody>
@@ -9109,45 +10170,61 @@
               <a:buFontTx/>
               <a:buChar char="-"/>
             </a:pPr>
+            <a:r>
+              <a:rPr lang="en-US" dirty="0"/>
+              <a:t>ETW (Event Tracing for Windows) – extremely high-performance instrumentation across drivers et. al.</a:t>
+            </a:r>
+            <a:br>
+              <a:rPr lang="en-US" dirty="0"/>
+            </a:br>
+            <a:r>
+              <a:rPr lang="en-US" dirty="0"/>
+              <a:t>Not particularly easy to use from C#</a:t>
+            </a:r>
+          </a:p>
+          <a:p>
+            <a:pPr marL="457200" indent="-457200">
+              <a:buFontTx/>
+              <a:buChar char="-"/>
+            </a:pPr>
+            <a:r>
+              <a:rPr lang="en-US" dirty="0"/>
+              <a:t>Custom</a:t>
+            </a:r>
+          </a:p>
+          <a:p>
+            <a:pPr marL="457200" indent="-457200">
+              <a:buFontTx/>
+              <a:buChar char="-"/>
+            </a:pPr>
+            <a:r>
+              <a:rPr lang="en-US" dirty="0" err="1"/>
+              <a:t>TraceSource</a:t>
+            </a:r>
             <a:endParaRPr lang="en-US" dirty="0"/>
           </a:p>
-        </p:txBody>
-      </p:sp>
-      <p:pic>
-        <p:nvPicPr>
-          <p:cNvPr id="11" name="Picture 10">
-            <a:extLst>
-              <a:ext uri="{FF2B5EF4-FFF2-40B4-BE49-F238E27FC236}">
-                <a16:creationId xmlns:a16="http://schemas.microsoft.com/office/drawing/2014/main" id="{F2220D5E-173D-67B7-07A2-3782210ACC4E}"/>
-              </a:ext>
-            </a:extLst>
-          </p:cNvPr>
-          <p:cNvPicPr>
-            <a:picLocks noChangeAspect="1"/>
-          </p:cNvPicPr>
-          <p:nvPr/>
-        </p:nvPicPr>
-        <p:blipFill>
-          <a:blip r:embed="rId3">
-            <a:extLst>
-              <a:ext uri="{28A0092B-C50C-407E-A947-70E740481C1C}">
-                <a14:useLocalDpi xmlns:a14="http://schemas.microsoft.com/office/drawing/2010/main" val="0"/>
-              </a:ext>
-            </a:extLst>
-          </a:blip>
-          <a:srcRect/>
-          <a:stretch/>
-        </p:blipFill>
-        <p:spPr>
-          <a:xfrm>
-            <a:off x="1807" y="1875146"/>
-            <a:ext cx="12188386" cy="3107707"/>
-          </a:xfrm>
-          <a:prstGeom prst="rect">
-            <a:avLst/>
-          </a:prstGeom>
-        </p:spPr>
-      </p:pic>
+          <a:p>
+            <a:pPr marL="457200" indent="-457200">
+              <a:buFontTx/>
+              <a:buChar char="-"/>
+            </a:pPr>
+            <a:r>
+              <a:rPr lang="en-US" dirty="0"/>
+              <a:t>Modern: OTEL Traces</a:t>
+            </a:r>
+          </a:p>
+          <a:p>
+            <a:pPr marL="796926" lvl="1" indent="-457200">
+              <a:buFontTx/>
+              <a:buChar char="-"/>
+            </a:pPr>
+            <a:r>
+              <a:rPr lang="en-US" dirty="0"/>
+              <a:t>Replaces all of these.</a:t>
+            </a:r>
+          </a:p>
+        </p:txBody>
+      </p:sp>
       <p:pic>
         <p:nvPicPr>
           <p:cNvPr id="3074" name="Picture 2">
@@ -9163,7 +10240,7 @@
           <p:nvPr/>
         </p:nvPicPr>
         <p:blipFill>
-          <a:blip r:embed="rId4">
+          <a:blip r:embed="rId3">
             <a:extLst>
               <a:ext uri="{28A0092B-C50C-407E-A947-70E740481C1C}">
                 <a14:useLocalDpi xmlns:a14="http://schemas.microsoft.com/office/drawing/2010/main" val="0"/>
@@ -9177,7 +10254,7 @@
         </p:blipFill>
         <p:spPr bwMode="auto">
           <a:xfrm>
-            <a:off x="8691167" y="3851959"/>
+            <a:off x="8198798" y="2857172"/>
             <a:ext cx="3044586" cy="2716530"/>
           </a:xfrm>
           <a:prstGeom prst="rect">
@@ -9275,12 +10352,96 @@
         <p:spPr>
           <a:xfrm>
             <a:off x="269239" y="1197324"/>
-            <a:ext cx="11653523" cy="632737"/>
+            <a:ext cx="11653523" cy="5013937"/>
           </a:xfrm>
         </p:spPr>
         <p:txBody>
           <a:bodyPr/>
           <a:lstStyle/>
+          <a:p>
+            <a:pPr marL="457200" indent="-457200">
+              <a:buFontTx/>
+              <a:buChar char="-"/>
+            </a:pPr>
+            <a:r>
+              <a:rPr lang="en-US" dirty="0"/>
+              <a:t>ETW logs</a:t>
+            </a:r>
+          </a:p>
+          <a:p>
+            <a:pPr marL="457200" indent="-457200">
+              <a:buFontTx/>
+              <a:buChar char="-"/>
+            </a:pPr>
+            <a:r>
+              <a:rPr lang="en-US" dirty="0"/>
+              <a:t>Custom logs</a:t>
+            </a:r>
+          </a:p>
+          <a:p>
+            <a:pPr marL="457200" indent="-457200">
+              <a:buFontTx/>
+              <a:buChar char="-"/>
+            </a:pPr>
+            <a:r>
+              <a:rPr lang="en-US" dirty="0" err="1"/>
+              <a:t>EventLog</a:t>
+            </a:r>
+            <a:r>
+              <a:rPr lang="en-US" dirty="0"/>
+              <a:t> (particularly services)</a:t>
+            </a:r>
+          </a:p>
+          <a:p>
+            <a:pPr marL="457200" indent="-457200">
+              <a:buFontTx/>
+              <a:buChar char="-"/>
+            </a:pPr>
+            <a:r>
+              <a:rPr lang="en-US" dirty="0" err="1"/>
+              <a:t>Trace.WriteLine</a:t>
+            </a:r>
+            <a:r>
+              <a:rPr lang="en-US" dirty="0"/>
+              <a:t> – replaced by </a:t>
+            </a:r>
+            <a:r>
+              <a:rPr lang="en-US" dirty="0" err="1"/>
+              <a:t>TraceSource</a:t>
+            </a:r>
+            <a:endParaRPr lang="en-US" dirty="0"/>
+          </a:p>
+          <a:p>
+            <a:pPr marL="457200" indent="-457200">
+              <a:buFontTx/>
+              <a:buChar char="-"/>
+            </a:pPr>
+            <a:r>
+              <a:rPr lang="en-US" dirty="0" err="1"/>
+              <a:t>TraceSource</a:t>
+            </a:r>
+            <a:endParaRPr lang="en-US" dirty="0"/>
+          </a:p>
+          <a:p>
+            <a:pPr marL="457200" indent="-457200">
+              <a:buFontTx/>
+              <a:buChar char="-"/>
+            </a:pPr>
+            <a:r>
+              <a:rPr lang="en-US" dirty="0"/>
+              <a:t>Modern: OTEL logs</a:t>
+            </a:r>
+          </a:p>
+          <a:p>
+            <a:pPr marL="796926" lvl="1" indent="-457200">
+              <a:buFontTx/>
+              <a:buChar char="-"/>
+            </a:pPr>
+            <a:r>
+              <a:rPr lang="en-US" dirty="0"/>
+              <a:t>Replaces all of these</a:t>
+            </a:r>
+          </a:p>
           <a:p>
             <a:pPr marL="457200" indent="-457200">
               <a:buFontTx/>
@@ -9288,43 +10449,15 @@
             </a:pPr>
             <a:endParaRPr lang="en-US" dirty="0"/>
           </a:p>
-        </p:txBody>
-      </p:sp>
-      <p:pic>
-        <p:nvPicPr>
-          <p:cNvPr id="11" name="Picture 10">
-            <a:extLst>
-              <a:ext uri="{FF2B5EF4-FFF2-40B4-BE49-F238E27FC236}">
-                <a16:creationId xmlns:a16="http://schemas.microsoft.com/office/drawing/2014/main" id="{F2220D5E-173D-67B7-07A2-3782210ACC4E}"/>
-              </a:ext>
-            </a:extLst>
-          </p:cNvPr>
-          <p:cNvPicPr>
-            <a:picLocks noChangeAspect="1"/>
-          </p:cNvPicPr>
-          <p:nvPr/>
-        </p:nvPicPr>
-        <p:blipFill>
-          <a:blip r:embed="rId2">
-            <a:extLst>
-              <a:ext uri="{28A0092B-C50C-407E-A947-70E740481C1C}">
-                <a14:useLocalDpi xmlns:a14="http://schemas.microsoft.com/office/drawing/2010/main" val="0"/>
-              </a:ext>
-            </a:extLst>
-          </a:blip>
-          <a:srcRect/>
-          <a:stretch/>
-        </p:blipFill>
-        <p:spPr>
-          <a:xfrm>
-            <a:off x="1807" y="1875146"/>
-            <a:ext cx="12188386" cy="3107708"/>
-          </a:xfrm>
-          <a:prstGeom prst="rect">
-            <a:avLst/>
-          </a:prstGeom>
-        </p:spPr>
-      </p:pic>
+          <a:p>
+            <a:pPr marL="457200" indent="-457200">
+              <a:buFontTx/>
+              <a:buChar char="-"/>
+            </a:pPr>
+            <a:endParaRPr lang="en-US" dirty="0"/>
+          </a:p>
+        </p:txBody>
+      </p:sp>
       <p:pic>
         <p:nvPicPr>
           <p:cNvPr id="4098" name="Picture 2">
@@ -9340,7 +10473,7 @@
           <p:nvPr/>
         </p:nvPicPr>
         <p:blipFill>
-          <a:blip r:embed="rId3">
+          <a:blip r:embed="rId2">
             <a:extLst>
               <a:ext uri="{28A0092B-C50C-407E-A947-70E740481C1C}">
                 <a14:useLocalDpi xmlns:a14="http://schemas.microsoft.com/office/drawing/2010/main" val="0"/>
@@ -9354,7 +10487,7 @@
         </p:blipFill>
         <p:spPr bwMode="auto">
           <a:xfrm>
-            <a:off x="8196582" y="4084369"/>
+            <a:off x="7915228" y="3429000"/>
             <a:ext cx="3726180" cy="2484120"/>
           </a:xfrm>
           <a:prstGeom prst="rect">

--- a/Telemetry/Logging Hero.pptx
+++ b/Telemetry/Logging Hero.pptx
@@ -6,7 +6,7 @@
     <p:sldMasterId id="2147483718" r:id="rId2"/>
   </p:sldMasterIdLst>
   <p:notesMasterIdLst>
-    <p:notesMasterId r:id="rId28"/>
+    <p:notesMasterId r:id="rId38"/>
   </p:notesMasterIdLst>
   <p:sldIdLst>
     <p:sldId id="256" r:id="rId3"/>
@@ -32,8 +32,18 @@
     <p:sldId id="425" r:id="rId23"/>
     <p:sldId id="428" r:id="rId24"/>
     <p:sldId id="429" r:id="rId25"/>
-    <p:sldId id="390" r:id="rId26"/>
-    <p:sldId id="410" r:id="rId27"/>
+    <p:sldId id="430" r:id="rId26"/>
+    <p:sldId id="431" r:id="rId27"/>
+    <p:sldId id="432" r:id="rId28"/>
+    <p:sldId id="434" r:id="rId29"/>
+    <p:sldId id="433" r:id="rId30"/>
+    <p:sldId id="435" r:id="rId31"/>
+    <p:sldId id="436" r:id="rId32"/>
+    <p:sldId id="439" r:id="rId33"/>
+    <p:sldId id="437" r:id="rId34"/>
+    <p:sldId id="438" r:id="rId35"/>
+    <p:sldId id="390" r:id="rId36"/>
+    <p:sldId id="410" r:id="rId37"/>
   </p:sldIdLst>
   <p:sldSz cx="12192000" cy="6858000"/>
   <p:notesSz cx="6858000" cy="9144000"/>
@@ -160,6 +170,16 @@
             <p14:sldId id="425"/>
             <p14:sldId id="428"/>
             <p14:sldId id="429"/>
+            <p14:sldId id="430"/>
+            <p14:sldId id="431"/>
+            <p14:sldId id="432"/>
+            <p14:sldId id="434"/>
+            <p14:sldId id="433"/>
+            <p14:sldId id="435"/>
+            <p14:sldId id="436"/>
+            <p14:sldId id="439"/>
+            <p14:sldId id="437"/>
+            <p14:sldId id="438"/>
             <p14:sldId id="390"/>
             <p14:sldId id="410"/>
           </p14:sldIdLst>
@@ -255,7 +275,7 @@
           <a:p>
             <a:fld id="{574E8BCA-0B4F-4373-B78E-3D2899449797}" type="datetimeFigureOut">
               <a:rPr lang="en-US" smtClean="0"/>
-              <a:t>9/7/2026</a:t>
+              <a:t>9/11/2026</a:t>
             </a:fld>
             <a:endParaRPr lang="en-US" dirty="0"/>
           </a:p>
@@ -939,16 +959,6 @@
               <a:t>And searching by tags</a:t>
             </a:r>
           </a:p>
-          <a:p>
-            <a:pPr marL="171450" indent="-171450">
-              <a:buFont typeface="Arial" panose="020B0604020202020204" pitchFamily="34" charset="0"/>
-              <a:buChar char="•"/>
-            </a:pPr>
-            <a:r>
-              <a:rPr lang="en-US" baseline="0" dirty="0"/>
-              <a:t>Do full Logos demo at this point.</a:t>
-            </a:r>
-          </a:p>
         </p:txBody>
       </p:sp>
       <p:sp>
@@ -1749,7 +1759,13 @@
   <p:cSld>
     <p:spTree>
       <p:nvGrpSpPr>
-        <p:cNvPr id="1" name=""/>
+        <p:cNvPr id="1" name="">
+          <a:extLst>
+            <a:ext uri="{FF2B5EF4-FFF2-40B4-BE49-F238E27FC236}">
+              <a16:creationId xmlns:a16="http://schemas.microsoft.com/office/drawing/2014/main" id="{A7799C31-7E7F-F458-7138-E80B21C06209}"/>
+            </a:ext>
+          </a:extLst>
+        </p:cNvPr>
         <p:cNvGrpSpPr/>
         <p:nvPr/>
       </p:nvGrpSpPr>
@@ -1763,7 +1779,13 @@
       </p:grpSpPr>
       <p:sp>
         <p:nvSpPr>
-          <p:cNvPr id="2" name="Slide Image Placeholder 1"/>
+          <p:cNvPr id="2" name="Slide Image Placeholder 1">
+            <a:extLst>
+              <a:ext uri="{FF2B5EF4-FFF2-40B4-BE49-F238E27FC236}">
+                <a16:creationId xmlns:a16="http://schemas.microsoft.com/office/drawing/2014/main" id="{DAD6CA88-6A5E-9975-F56C-AC7F80365150}"/>
+              </a:ext>
+            </a:extLst>
+          </p:cNvPr>
           <p:cNvSpPr>
             <a:spLocks noGrp="1" noRot="1" noChangeAspect="1"/>
           </p:cNvSpPr>
@@ -1780,7 +1802,13 @@
       </p:sp>
       <p:sp>
         <p:nvSpPr>
-          <p:cNvPr id="3" name="Notes Placeholder 2"/>
+          <p:cNvPr id="3" name="Notes Placeholder 2">
+            <a:extLst>
+              <a:ext uri="{FF2B5EF4-FFF2-40B4-BE49-F238E27FC236}">
+                <a16:creationId xmlns:a16="http://schemas.microsoft.com/office/drawing/2014/main" id="{9A8BC54C-8385-7109-0FFE-17E08D5AA52D}"/>
+              </a:ext>
+            </a:extLst>
+          </p:cNvPr>
           <p:cNvSpPr>
             <a:spLocks noGrp="1"/>
           </p:cNvSpPr>
@@ -1793,13 +1821,33 @@
           <a:bodyPr/>
           <a:lstStyle/>
           <a:p>
+            <a:pPr marL="171450" indent="-171450">
+              <a:buFont typeface="Arial" panose="020B0604020202020204" pitchFamily="34" charset="0"/>
+              <a:buChar char="•"/>
+            </a:pPr>
+            <a:r>
+              <a:rPr lang="en-US" baseline="0" dirty="0"/>
+              <a:t>Personally, I don’t find custom metrics to be particularly valuable.</a:t>
+            </a:r>
+          </a:p>
+          <a:p>
+            <a:pPr marL="171450" indent="-171450">
+              <a:buFont typeface="Arial" panose="020B0604020202020204" pitchFamily="34" charset="0"/>
+              <a:buChar char="•"/>
+            </a:pPr>
             <a:endParaRPr lang="en-US" baseline="0" dirty="0"/>
           </a:p>
         </p:txBody>
       </p:sp>
       <p:sp>
         <p:nvSpPr>
-          <p:cNvPr id="4" name="Slide Number Placeholder 3"/>
+          <p:cNvPr id="4" name="Slide Number Placeholder 3">
+            <a:extLst>
+              <a:ext uri="{FF2B5EF4-FFF2-40B4-BE49-F238E27FC236}">
+                <a16:creationId xmlns:a16="http://schemas.microsoft.com/office/drawing/2014/main" id="{41D6EF2E-6972-D136-8E85-59DC8D2D51A3}"/>
+              </a:ext>
+            </a:extLst>
+          </p:cNvPr>
           <p:cNvSpPr>
             <a:spLocks noGrp="1"/>
           </p:cNvSpPr>
@@ -1814,7 +1862,7 @@
           <a:p>
             <a:fld id="{94CE3395-F8FF-4336-B2AA-E15575B990E7}" type="slidenum">
               <a:rPr lang="en-US" smtClean="0"/>
-              <a:t>24</a:t>
+              <a:t>26</a:t>
             </a:fld>
             <a:endParaRPr lang="en-US" dirty="0"/>
           </a:p>
@@ -1823,7 +1871,7 @@
     </p:spTree>
     <p:extLst>
       <p:ext uri="{BB962C8B-B14F-4D97-AF65-F5344CB8AC3E}">
-        <p14:creationId xmlns:p14="http://schemas.microsoft.com/office/powerpoint/2010/main" val="2659012186"/>
+        <p14:creationId xmlns:p14="http://schemas.microsoft.com/office/powerpoint/2010/main" val="544839301"/>
       </p:ext>
     </p:extLst>
   </p:cSld>
@@ -1834,6 +1882,357 @@
 </file>
 
 <file path=ppt/notesSlides/notesSlide22.xml><?xml version="1.0" encoding="utf-8"?>
+<p:notes xmlns:a="http://schemas.openxmlformats.org/drawingml/2006/main" xmlns:r="http://schemas.openxmlformats.org/officeDocument/2006/relationships" xmlns:p="http://schemas.openxmlformats.org/presentationml/2006/main">
+  <p:cSld>
+    <p:spTree>
+      <p:nvGrpSpPr>
+        <p:cNvPr id="1" name="">
+          <a:extLst>
+            <a:ext uri="{FF2B5EF4-FFF2-40B4-BE49-F238E27FC236}">
+              <a16:creationId xmlns:a16="http://schemas.microsoft.com/office/drawing/2014/main" id="{112BB4B3-0148-89E0-DF7D-8B3DE1BBD042}"/>
+            </a:ext>
+          </a:extLst>
+        </p:cNvPr>
+        <p:cNvGrpSpPr/>
+        <p:nvPr/>
+      </p:nvGrpSpPr>
+      <p:grpSpPr>
+        <a:xfrm>
+          <a:off x="0" y="0"/>
+          <a:ext cx="0" cy="0"/>
+          <a:chOff x="0" y="0"/>
+          <a:chExt cx="0" cy="0"/>
+        </a:xfrm>
+      </p:grpSpPr>
+      <p:sp>
+        <p:nvSpPr>
+          <p:cNvPr id="2" name="Slide Image Placeholder 1">
+            <a:extLst>
+              <a:ext uri="{FF2B5EF4-FFF2-40B4-BE49-F238E27FC236}">
+                <a16:creationId xmlns:a16="http://schemas.microsoft.com/office/drawing/2014/main" id="{3CD421BE-7C0A-6F67-284A-F0E72B96696E}"/>
+              </a:ext>
+            </a:extLst>
+          </p:cNvPr>
+          <p:cNvSpPr>
+            <a:spLocks noGrp="1" noRot="1" noChangeAspect="1"/>
+          </p:cNvSpPr>
+          <p:nvPr>
+            <p:ph type="sldImg"/>
+          </p:nvPr>
+        </p:nvSpPr>
+        <p:spPr>
+          <a:xfrm>
+            <a:off x="685800" y="1143000"/>
+            <a:ext cx="5486400" cy="3086100"/>
+          </a:xfrm>
+        </p:spPr>
+      </p:sp>
+      <p:sp>
+        <p:nvSpPr>
+          <p:cNvPr id="3" name="Notes Placeholder 2">
+            <a:extLst>
+              <a:ext uri="{FF2B5EF4-FFF2-40B4-BE49-F238E27FC236}">
+                <a16:creationId xmlns:a16="http://schemas.microsoft.com/office/drawing/2014/main" id="{6ADCA926-0AEF-A780-BFAA-DB7246DE2CA1}"/>
+              </a:ext>
+            </a:extLst>
+          </p:cNvPr>
+          <p:cNvSpPr>
+            <a:spLocks noGrp="1"/>
+          </p:cNvSpPr>
+          <p:nvPr>
+            <p:ph type="body" idx="1"/>
+          </p:nvPr>
+        </p:nvSpPr>
+        <p:spPr/>
+        <p:txBody>
+          <a:bodyPr/>
+          <a:lstStyle/>
+          <a:p>
+            <a:pPr marL="171450" indent="-171450">
+              <a:buFont typeface="Arial" panose="020B0604020202020204" pitchFamily="34" charset="0"/>
+              <a:buChar char="•"/>
+            </a:pPr>
+            <a:endParaRPr lang="en-US" baseline="0" dirty="0"/>
+          </a:p>
+        </p:txBody>
+      </p:sp>
+      <p:sp>
+        <p:nvSpPr>
+          <p:cNvPr id="4" name="Slide Number Placeholder 3">
+            <a:extLst>
+              <a:ext uri="{FF2B5EF4-FFF2-40B4-BE49-F238E27FC236}">
+                <a16:creationId xmlns:a16="http://schemas.microsoft.com/office/drawing/2014/main" id="{779850E3-94DB-2A7B-A397-0ADE18FA891F}"/>
+              </a:ext>
+            </a:extLst>
+          </p:cNvPr>
+          <p:cNvSpPr>
+            <a:spLocks noGrp="1"/>
+          </p:cNvSpPr>
+          <p:nvPr>
+            <p:ph type="sldNum" sz="quarter" idx="10"/>
+          </p:nvPr>
+        </p:nvSpPr>
+        <p:spPr/>
+        <p:txBody>
+          <a:bodyPr/>
+          <a:lstStyle/>
+          <a:p>
+            <a:fld id="{94CE3395-F8FF-4336-B2AA-E15575B990E7}" type="slidenum">
+              <a:rPr lang="en-US" smtClean="0"/>
+              <a:t>30</a:t>
+            </a:fld>
+            <a:endParaRPr lang="en-US" dirty="0"/>
+          </a:p>
+        </p:txBody>
+      </p:sp>
+    </p:spTree>
+    <p:extLst>
+      <p:ext uri="{BB962C8B-B14F-4D97-AF65-F5344CB8AC3E}">
+        <p14:creationId xmlns:p14="http://schemas.microsoft.com/office/powerpoint/2010/main" val="3328558583"/>
+      </p:ext>
+    </p:extLst>
+  </p:cSld>
+  <p:clrMapOvr>
+    <a:masterClrMapping/>
+  </p:clrMapOvr>
+</p:notes>
+</file>
+
+<file path=ppt/notesSlides/notesSlide23.xml><?xml version="1.0" encoding="utf-8"?>
+<p:notes xmlns:a="http://schemas.openxmlformats.org/drawingml/2006/main" xmlns:r="http://schemas.openxmlformats.org/officeDocument/2006/relationships" xmlns:p="http://schemas.openxmlformats.org/presentationml/2006/main">
+  <p:cSld>
+    <p:spTree>
+      <p:nvGrpSpPr>
+        <p:cNvPr id="1" name="">
+          <a:extLst>
+            <a:ext uri="{FF2B5EF4-FFF2-40B4-BE49-F238E27FC236}">
+              <a16:creationId xmlns:a16="http://schemas.microsoft.com/office/drawing/2014/main" id="{8525EAFC-E633-F3DF-660C-D6C1FF863BD9}"/>
+            </a:ext>
+          </a:extLst>
+        </p:cNvPr>
+        <p:cNvGrpSpPr/>
+        <p:nvPr/>
+      </p:nvGrpSpPr>
+      <p:grpSpPr>
+        <a:xfrm>
+          <a:off x="0" y="0"/>
+          <a:ext cx="0" cy="0"/>
+          <a:chOff x="0" y="0"/>
+          <a:chExt cx="0" cy="0"/>
+        </a:xfrm>
+      </p:grpSpPr>
+      <p:sp>
+        <p:nvSpPr>
+          <p:cNvPr id="2" name="Slide Image Placeholder 1">
+            <a:extLst>
+              <a:ext uri="{FF2B5EF4-FFF2-40B4-BE49-F238E27FC236}">
+                <a16:creationId xmlns:a16="http://schemas.microsoft.com/office/drawing/2014/main" id="{79A485FC-0791-E125-BA3A-AE0D14489C33}"/>
+              </a:ext>
+            </a:extLst>
+          </p:cNvPr>
+          <p:cNvSpPr>
+            <a:spLocks noGrp="1" noRot="1" noChangeAspect="1"/>
+          </p:cNvSpPr>
+          <p:nvPr>
+            <p:ph type="sldImg"/>
+          </p:nvPr>
+        </p:nvSpPr>
+        <p:spPr>
+          <a:xfrm>
+            <a:off x="685800" y="1143000"/>
+            <a:ext cx="5486400" cy="3086100"/>
+          </a:xfrm>
+        </p:spPr>
+      </p:sp>
+      <p:sp>
+        <p:nvSpPr>
+          <p:cNvPr id="3" name="Notes Placeholder 2">
+            <a:extLst>
+              <a:ext uri="{FF2B5EF4-FFF2-40B4-BE49-F238E27FC236}">
+                <a16:creationId xmlns:a16="http://schemas.microsoft.com/office/drawing/2014/main" id="{32DD4C7E-96B5-6EE9-EB64-F5F005F76200}"/>
+              </a:ext>
+            </a:extLst>
+          </p:cNvPr>
+          <p:cNvSpPr>
+            <a:spLocks noGrp="1"/>
+          </p:cNvSpPr>
+          <p:nvPr>
+            <p:ph type="body" idx="1"/>
+          </p:nvPr>
+        </p:nvSpPr>
+        <p:spPr/>
+        <p:txBody>
+          <a:bodyPr/>
+          <a:lstStyle/>
+          <a:p>
+            <a:pPr marL="171450" indent="-171450">
+              <a:buFont typeface="Arial" panose="020B0604020202020204" pitchFamily="34" charset="0"/>
+              <a:buChar char="•"/>
+            </a:pPr>
+            <a:endParaRPr lang="en-US" baseline="0" dirty="0"/>
+          </a:p>
+        </p:txBody>
+      </p:sp>
+      <p:sp>
+        <p:nvSpPr>
+          <p:cNvPr id="4" name="Slide Number Placeholder 3">
+            <a:extLst>
+              <a:ext uri="{FF2B5EF4-FFF2-40B4-BE49-F238E27FC236}">
+                <a16:creationId xmlns:a16="http://schemas.microsoft.com/office/drawing/2014/main" id="{A7879371-9093-295E-597B-A4D19320B96E}"/>
+              </a:ext>
+            </a:extLst>
+          </p:cNvPr>
+          <p:cNvSpPr>
+            <a:spLocks noGrp="1"/>
+          </p:cNvSpPr>
+          <p:nvPr>
+            <p:ph type="sldNum" sz="quarter" idx="10"/>
+          </p:nvPr>
+        </p:nvSpPr>
+        <p:spPr/>
+        <p:txBody>
+          <a:bodyPr/>
+          <a:lstStyle/>
+          <a:p>
+            <a:fld id="{94CE3395-F8FF-4336-B2AA-E15575B990E7}" type="slidenum">
+              <a:rPr lang="en-US" smtClean="0"/>
+              <a:t>32</a:t>
+            </a:fld>
+            <a:endParaRPr lang="en-US" dirty="0"/>
+          </a:p>
+        </p:txBody>
+      </p:sp>
+    </p:spTree>
+    <p:extLst>
+      <p:ext uri="{BB962C8B-B14F-4D97-AF65-F5344CB8AC3E}">
+        <p14:creationId xmlns:p14="http://schemas.microsoft.com/office/powerpoint/2010/main" val="2115509888"/>
+      </p:ext>
+    </p:extLst>
+  </p:cSld>
+  <p:clrMapOvr>
+    <a:masterClrMapping/>
+  </p:clrMapOvr>
+</p:notes>
+</file>
+
+<file path=ppt/notesSlides/notesSlide24.xml><?xml version="1.0" encoding="utf-8"?>
+<p:notes xmlns:a="http://schemas.openxmlformats.org/drawingml/2006/main" xmlns:r="http://schemas.openxmlformats.org/officeDocument/2006/relationships" xmlns:p="http://schemas.openxmlformats.org/presentationml/2006/main">
+  <p:cSld>
+    <p:spTree>
+      <p:nvGrpSpPr>
+        <p:cNvPr id="1" name="">
+          <a:extLst>
+            <a:ext uri="{FF2B5EF4-FFF2-40B4-BE49-F238E27FC236}">
+              <a16:creationId xmlns:a16="http://schemas.microsoft.com/office/drawing/2014/main" id="{59E415AC-6FF0-1457-9EB0-8A158971DA71}"/>
+            </a:ext>
+          </a:extLst>
+        </p:cNvPr>
+        <p:cNvGrpSpPr/>
+        <p:nvPr/>
+      </p:nvGrpSpPr>
+      <p:grpSpPr>
+        <a:xfrm>
+          <a:off x="0" y="0"/>
+          <a:ext cx="0" cy="0"/>
+          <a:chOff x="0" y="0"/>
+          <a:chExt cx="0" cy="0"/>
+        </a:xfrm>
+      </p:grpSpPr>
+      <p:sp>
+        <p:nvSpPr>
+          <p:cNvPr id="2" name="Slide Image Placeholder 1">
+            <a:extLst>
+              <a:ext uri="{FF2B5EF4-FFF2-40B4-BE49-F238E27FC236}">
+                <a16:creationId xmlns:a16="http://schemas.microsoft.com/office/drawing/2014/main" id="{FCE59B03-F092-0A92-EF40-DC24A6B76E72}"/>
+              </a:ext>
+            </a:extLst>
+          </p:cNvPr>
+          <p:cNvSpPr>
+            <a:spLocks noGrp="1" noRot="1" noChangeAspect="1"/>
+          </p:cNvSpPr>
+          <p:nvPr>
+            <p:ph type="sldImg"/>
+          </p:nvPr>
+        </p:nvSpPr>
+        <p:spPr>
+          <a:xfrm>
+            <a:off x="685800" y="1143000"/>
+            <a:ext cx="5486400" cy="3086100"/>
+          </a:xfrm>
+        </p:spPr>
+      </p:sp>
+      <p:sp>
+        <p:nvSpPr>
+          <p:cNvPr id="3" name="Notes Placeholder 2">
+            <a:extLst>
+              <a:ext uri="{FF2B5EF4-FFF2-40B4-BE49-F238E27FC236}">
+                <a16:creationId xmlns:a16="http://schemas.microsoft.com/office/drawing/2014/main" id="{998C877C-950D-4CC6-BF36-25E689E16E8D}"/>
+              </a:ext>
+            </a:extLst>
+          </p:cNvPr>
+          <p:cNvSpPr>
+            <a:spLocks noGrp="1"/>
+          </p:cNvSpPr>
+          <p:nvPr>
+            <p:ph type="body" idx="1"/>
+          </p:nvPr>
+        </p:nvSpPr>
+        <p:spPr/>
+        <p:txBody>
+          <a:bodyPr/>
+          <a:lstStyle/>
+          <a:p>
+            <a:pPr marL="171450" indent="-171450">
+              <a:buFont typeface="Arial" panose="020B0604020202020204" pitchFamily="34" charset="0"/>
+              <a:buChar char="•"/>
+            </a:pPr>
+            <a:endParaRPr lang="en-US" baseline="0" dirty="0"/>
+          </a:p>
+        </p:txBody>
+      </p:sp>
+      <p:sp>
+        <p:nvSpPr>
+          <p:cNvPr id="4" name="Slide Number Placeholder 3">
+            <a:extLst>
+              <a:ext uri="{FF2B5EF4-FFF2-40B4-BE49-F238E27FC236}">
+                <a16:creationId xmlns:a16="http://schemas.microsoft.com/office/drawing/2014/main" id="{B3E7B66D-1EE7-5A7B-4F0C-7F2BEA0B4FB3}"/>
+              </a:ext>
+            </a:extLst>
+          </p:cNvPr>
+          <p:cNvSpPr>
+            <a:spLocks noGrp="1"/>
+          </p:cNvSpPr>
+          <p:nvPr>
+            <p:ph type="sldNum" sz="quarter" idx="10"/>
+          </p:nvPr>
+        </p:nvSpPr>
+        <p:spPr/>
+        <p:txBody>
+          <a:bodyPr/>
+          <a:lstStyle/>
+          <a:p>
+            <a:fld id="{94CE3395-F8FF-4336-B2AA-E15575B990E7}" type="slidenum">
+              <a:rPr lang="en-US" smtClean="0"/>
+              <a:t>33</a:t>
+            </a:fld>
+            <a:endParaRPr lang="en-US" dirty="0"/>
+          </a:p>
+        </p:txBody>
+      </p:sp>
+    </p:spTree>
+    <p:extLst>
+      <p:ext uri="{BB962C8B-B14F-4D97-AF65-F5344CB8AC3E}">
+        <p14:creationId xmlns:p14="http://schemas.microsoft.com/office/powerpoint/2010/main" val="1009056716"/>
+      </p:ext>
+    </p:extLst>
+  </p:cSld>
+  <p:clrMapOvr>
+    <a:masterClrMapping/>
+  </p:clrMapOvr>
+</p:notes>
+</file>
+
+<file path=ppt/notesSlides/notesSlide25.xml><?xml version="1.0" encoding="utf-8"?>
 <p:notes xmlns:a="http://schemas.openxmlformats.org/drawingml/2006/main" xmlns:r="http://schemas.openxmlformats.org/officeDocument/2006/relationships" xmlns:p="http://schemas.openxmlformats.org/presentationml/2006/main">
   <p:cSld>
     <p:spTree>
@@ -1882,7 +2281,7 @@
           <a:bodyPr/>
           <a:lstStyle/>
           <a:p>
-            <a:endParaRPr lang="en-US" dirty="0"/>
+            <a:endParaRPr lang="en-US" baseline="0" dirty="0"/>
           </a:p>
         </p:txBody>
       </p:sp>
@@ -1903,7 +2302,96 @@
           <a:p>
             <a:fld id="{94CE3395-F8FF-4336-B2AA-E15575B990E7}" type="slidenum">
               <a:rPr lang="en-US" smtClean="0"/>
-              <a:t>25</a:t>
+              <a:t>34</a:t>
+            </a:fld>
+            <a:endParaRPr lang="en-US" dirty="0"/>
+          </a:p>
+        </p:txBody>
+      </p:sp>
+    </p:spTree>
+    <p:extLst>
+      <p:ext uri="{BB962C8B-B14F-4D97-AF65-F5344CB8AC3E}">
+        <p14:creationId xmlns:p14="http://schemas.microsoft.com/office/powerpoint/2010/main" val="2659012186"/>
+      </p:ext>
+    </p:extLst>
+  </p:cSld>
+  <p:clrMapOvr>
+    <a:masterClrMapping/>
+  </p:clrMapOvr>
+</p:notes>
+</file>
+
+<file path=ppt/notesSlides/notesSlide26.xml><?xml version="1.0" encoding="utf-8"?>
+<p:notes xmlns:a="http://schemas.openxmlformats.org/drawingml/2006/main" xmlns:r="http://schemas.openxmlformats.org/officeDocument/2006/relationships" xmlns:p="http://schemas.openxmlformats.org/presentationml/2006/main">
+  <p:cSld>
+    <p:spTree>
+      <p:nvGrpSpPr>
+        <p:cNvPr id="1" name=""/>
+        <p:cNvGrpSpPr/>
+        <p:nvPr/>
+      </p:nvGrpSpPr>
+      <p:grpSpPr>
+        <a:xfrm>
+          <a:off x="0" y="0"/>
+          <a:ext cx="0" cy="0"/>
+          <a:chOff x="0" y="0"/>
+          <a:chExt cx="0" cy="0"/>
+        </a:xfrm>
+      </p:grpSpPr>
+      <p:sp>
+        <p:nvSpPr>
+          <p:cNvPr id="2" name="Slide Image Placeholder 1"/>
+          <p:cNvSpPr>
+            <a:spLocks noGrp="1" noRot="1" noChangeAspect="1"/>
+          </p:cNvSpPr>
+          <p:nvPr>
+            <p:ph type="sldImg"/>
+          </p:nvPr>
+        </p:nvSpPr>
+        <p:spPr>
+          <a:xfrm>
+            <a:off x="685800" y="1143000"/>
+            <a:ext cx="5486400" cy="3086100"/>
+          </a:xfrm>
+        </p:spPr>
+      </p:sp>
+      <p:sp>
+        <p:nvSpPr>
+          <p:cNvPr id="3" name="Notes Placeholder 2"/>
+          <p:cNvSpPr>
+            <a:spLocks noGrp="1"/>
+          </p:cNvSpPr>
+          <p:nvPr>
+            <p:ph type="body" idx="1"/>
+          </p:nvPr>
+        </p:nvSpPr>
+        <p:spPr/>
+        <p:txBody>
+          <a:bodyPr/>
+          <a:lstStyle/>
+          <a:p>
+            <a:endParaRPr lang="en-US" dirty="0"/>
+          </a:p>
+        </p:txBody>
+      </p:sp>
+      <p:sp>
+        <p:nvSpPr>
+          <p:cNvPr id="4" name="Slide Number Placeholder 3"/>
+          <p:cNvSpPr>
+            <a:spLocks noGrp="1"/>
+          </p:cNvSpPr>
+          <p:nvPr>
+            <p:ph type="sldNum" sz="quarter" idx="10"/>
+          </p:nvPr>
+        </p:nvSpPr>
+        <p:spPr/>
+        <p:txBody>
+          <a:bodyPr/>
+          <a:lstStyle/>
+          <a:p>
+            <a:fld id="{94CE3395-F8FF-4336-B2AA-E15575B990E7}" type="slidenum">
+              <a:rPr lang="en-US" smtClean="0"/>
+              <a:t>35</a:t>
             </a:fld>
             <a:endParaRPr lang="en-US" dirty="0"/>
           </a:p>
@@ -2431,7 +2919,7 @@
             </a:pPr>
             <a:r>
               <a:rPr lang="en-US" baseline="0" dirty="0"/>
-              <a:t>(and under the hood of .NET Aspire)</a:t>
+              <a:t>(and under the hood of Aspire)</a:t>
             </a:r>
           </a:p>
           <a:p>
@@ -2441,13 +2929,28 @@
             </a:pPr>
             <a:r>
               <a:rPr lang="en-US" baseline="0" dirty="0"/>
-              <a:t>(and example </a:t>
-            </a:r>
-            <a:r>
-              <a:rPr lang="en-US" baseline="0"/>
-              <a:t>of failures)</a:t>
-            </a:r>
-            <a:endParaRPr lang="en-US" baseline="0" dirty="0"/>
+              <a:t>(and example of failures)</a:t>
+            </a:r>
+          </a:p>
+          <a:p>
+            <a:pPr marL="171450" indent="-171450">
+              <a:buFont typeface="Arial" panose="020B0604020202020204" pitchFamily="34" charset="0"/>
+              <a:buChar char="•"/>
+            </a:pPr>
+            <a:r>
+              <a:rPr lang="en-US" baseline="0" dirty="0"/>
+              <a:t>(compare how Seq combines logs and traces, while Aspire separates them)</a:t>
+            </a:r>
+          </a:p>
+          <a:p>
+            <a:pPr marL="171450" indent="-171450">
+              <a:buFont typeface="Arial" panose="020B0604020202020204" pitchFamily="34" charset="0"/>
+              <a:buChar char="•"/>
+            </a:pPr>
+            <a:r>
+              <a:rPr lang="en-US" baseline="0" dirty="0"/>
+              <a:t>(undo failure code before continuing)</a:t>
+            </a:r>
           </a:p>
         </p:txBody>
       </p:sp>
@@ -5519,7 +6022,22 @@
                   <a:schemeClr val="bg1"/>
                 </a:solidFill>
               </a:rPr>
-              <a:t>Be a Logging Hero!</a:t>
+              <a:t>.NET Telemetry</a:t>
+            </a:r>
+            <a:br>
+              <a:rPr lang="en-US" dirty="0">
+                <a:solidFill>
+                  <a:schemeClr val="bg1"/>
+                </a:solidFill>
+              </a:rPr>
+            </a:br>
+            <a:r>
+              <a:rPr lang="en-US" dirty="0">
+                <a:solidFill>
+                  <a:schemeClr val="bg1"/>
+                </a:solidFill>
+              </a:rPr>
+              <a:t>in the Real World</a:t>
             </a:r>
           </a:p>
         </p:txBody>
@@ -7350,7 +7868,7 @@
         <p:spPr>
           <a:xfrm>
             <a:off x="269239" y="1197324"/>
-            <a:ext cx="11653523" cy="4860626"/>
+            <a:ext cx="11653523" cy="4832926"/>
           </a:xfrm>
         </p:spPr>
         <p:txBody>
@@ -7373,22 +7891,34 @@
               </a:rPr>
             </a:br>
             <a:r>
-              <a:rPr lang="en-US" sz="2200" dirty="0">
+              <a:rPr lang="en-US" sz="2100" dirty="0">
                 <a:latin typeface="Consolas" panose="020B0609020204030204" pitchFamily="49" charset="0"/>
               </a:rPr>
               <a:t>_</a:t>
             </a:r>
             <a:r>
-              <a:rPr lang="en-US" sz="2200" dirty="0" err="1">
+              <a:rPr lang="en-US" sz="2100" dirty="0" err="1">
                 <a:latin typeface="Consolas" panose="020B0609020204030204" pitchFamily="49" charset="0"/>
               </a:rPr>
               <a:t>logger.LogInformation</a:t>
             </a:r>
             <a:r>
-              <a:rPr lang="en-US" sz="2200" dirty="0">
+              <a:rPr lang="en-US" sz="2100" dirty="0">
                 <a:latin typeface="Consolas" panose="020B0609020204030204" pitchFamily="49" charset="0"/>
               </a:rPr>
-              <a:t>("Forecast result: {temperature}", temperature);</a:t>
+              <a:t>("Forecast result: {temperature}", </a:t>
+            </a:r>
+            <a:r>
+              <a:rPr lang="en-US" sz="2100" dirty="0" err="1">
+                <a:latin typeface="Consolas" panose="020B0609020204030204" pitchFamily="49" charset="0"/>
+              </a:rPr>
+              <a:t>temperatureValue</a:t>
+            </a:r>
+            <a:r>
+              <a:rPr lang="en-US" sz="2100" dirty="0">
+                <a:latin typeface="Consolas" panose="020B0609020204030204" pitchFamily="49" charset="0"/>
+              </a:rPr>
+              <a:t>);</a:t>
             </a:r>
             <a:br>
               <a:rPr lang="en-US" sz="2200" dirty="0">
@@ -7624,7 +8154,7 @@
         <p:spPr>
           <a:xfrm>
             <a:off x="269239" y="1197324"/>
-            <a:ext cx="11653523" cy="4449423"/>
+            <a:ext cx="11653523" cy="4383059"/>
           </a:xfrm>
         </p:spPr>
         <p:txBody>
@@ -7647,7 +8177,7 @@
             </a:pPr>
             <a:r>
               <a:rPr lang="en-US" dirty="0"/>
-              <a:t>Azure AppInsights/Monitor </a:t>
+              <a:t>Azure Monitor </a:t>
             </a:r>
             <a:r>
               <a:rPr lang="en-US" dirty="0">
@@ -7658,6 +8188,36 @@
             <a:endParaRPr lang="en-US" dirty="0"/>
           </a:p>
           <a:p>
+            <a:pPr marL="1030290" lvl="2" indent="-457200">
+              <a:buFontTx/>
+              <a:buChar char="-"/>
+            </a:pPr>
+            <a:r>
+              <a:rPr lang="en-US" dirty="0" err="1">
+                <a:latin typeface="Consolas" panose="020B0609020204030204" pitchFamily="49" charset="0"/>
+              </a:rPr>
+              <a:t>toint</a:t>
+            </a:r>
+            <a:r>
+              <a:rPr lang="en-US" dirty="0">
+                <a:latin typeface="Consolas" panose="020B0609020204030204" pitchFamily="49" charset="0"/>
+              </a:rPr>
+              <a:t>(</a:t>
+            </a:r>
+            <a:r>
+              <a:rPr lang="en-US" dirty="0" err="1">
+                <a:latin typeface="Consolas" panose="020B0609020204030204" pitchFamily="49" charset="0"/>
+              </a:rPr>
+              <a:t>customDimensions</a:t>
+            </a:r>
+            <a:r>
+              <a:rPr lang="en-US" dirty="0">
+                <a:latin typeface="Consolas" panose="020B0609020204030204" pitchFamily="49" charset="0"/>
+              </a:rPr>
+              <a:t>[“temperature"]) &gt; 5</a:t>
+            </a:r>
+          </a:p>
+          <a:p>
             <a:pPr marL="796926" lvl="1" indent="-457200">
               <a:buFontTx/>
               <a:buChar char="-"/>
@@ -7683,18 +8243,10 @@
               <a:buChar char="-"/>
             </a:pPr>
             <a:r>
-              <a:rPr lang="en-US" dirty="0"/>
-              <a:t>(Use X-Ray for metrics: </a:t>
-            </a:r>
-            <a:r>
               <a:rPr lang="en-US" dirty="0">
-                <a:hlinkClick r:id="rId5"/>
+                <a:latin typeface="Consolas" panose="020B0609020204030204" pitchFamily="49" charset="0"/>
               </a:rPr>
-              <a:t>https://tinyurl.com/AWS-OTEL-metrics</a:t>
-            </a:r>
-            <a:r>
-              <a:rPr lang="en-US" dirty="0"/>
-              <a:t>)</a:t>
+              <a:t>temperature &gt; 5      { $.temperature &gt; 5 }</a:t>
             </a:r>
           </a:p>
           <a:p>
@@ -7749,14 +8301,8 @@
             </a:pPr>
             <a:r>
               <a:rPr lang="en-US" dirty="0"/>
-              <a:t>Self-hosted:</a:t>
-            </a:r>
-          </a:p>
-          <a:p>
-            <a:pPr marL="796926" lvl="1" indent="-457200">
-              <a:buFontTx/>
-              <a:buChar char="-"/>
-            </a:pPr>
+              <a:t>Self-hosted: </a:t>
+            </a:r>
             <a:r>
               <a:rPr lang="en-US" dirty="0" err="1"/>
               <a:t>Graylog</a:t>
@@ -7783,7 +8329,7 @@
           <p:nvPr/>
         </p:nvPicPr>
         <p:blipFill>
-          <a:blip r:embed="rId6">
+          <a:blip r:embed="rId5">
             <a:extLst>
               <a:ext uri="{28A0092B-C50C-407E-A947-70E740481C1C}">
                 <a14:useLocalDpi xmlns:a14="http://schemas.microsoft.com/office/drawing/2010/main" val="0"/>
@@ -7797,7 +8343,7 @@
         </p:blipFill>
         <p:spPr bwMode="auto">
           <a:xfrm>
-            <a:off x="6605288" y="3053089"/>
+            <a:off x="7590026" y="2994873"/>
             <a:ext cx="3882690" cy="2593658"/>
           </a:xfrm>
           <a:prstGeom prst="rect">
@@ -9138,7 +9684,13 @@
       </p:grpSpPr>
       <p:sp>
         <p:nvSpPr>
-          <p:cNvPr id="4" name="Title 3"/>
+          <p:cNvPr id="2" name="Title 1">
+            <a:extLst>
+              <a:ext uri="{FF2B5EF4-FFF2-40B4-BE49-F238E27FC236}">
+                <a16:creationId xmlns:a16="http://schemas.microsoft.com/office/drawing/2014/main" id="{8D42D650-641E-A8B0-9D3D-917CA4CB0C72}"/>
+              </a:ext>
+            </a:extLst>
+          </p:cNvPr>
           <p:cNvSpPr>
             <a:spLocks noGrp="1"/>
           </p:cNvSpPr>
@@ -9153,151 +9705,7 @@
           <a:p>
             <a:r>
               <a:rPr lang="en-US" dirty="0"/>
-              <a:t>Q&amp;A</a:t>
-            </a:r>
-          </a:p>
-        </p:txBody>
-      </p:sp>
-      <p:pic>
-        <p:nvPicPr>
-          <p:cNvPr id="5" name="Picture 4"/>
-          <p:cNvPicPr>
-            <a:picLocks noChangeAspect="1"/>
-          </p:cNvPicPr>
-          <p:nvPr/>
-        </p:nvPicPr>
-        <p:blipFill>
-          <a:blip r:embed="rId3" cstate="print">
-            <a:extLst>
-              <a:ext uri="{28A0092B-C50C-407E-A947-70E740481C1C}">
-                <a14:useLocalDpi xmlns:a14="http://schemas.microsoft.com/office/drawing/2010/main" val="0"/>
-              </a:ext>
-            </a:extLst>
-          </a:blip>
-          <a:stretch>
-            <a:fillRect/>
-          </a:stretch>
-        </p:blipFill>
-        <p:spPr>
-          <a:xfrm>
-            <a:off x="6724529" y="1103070"/>
-            <a:ext cx="3129100" cy="3981780"/>
-          </a:xfrm>
-          <a:prstGeom prst="rect">
-            <a:avLst/>
-          </a:prstGeom>
-        </p:spPr>
-      </p:pic>
-      <p:sp>
-        <p:nvSpPr>
-          <p:cNvPr id="6" name="TextBox 5"/>
-          <p:cNvSpPr txBox="1"/>
-          <p:nvPr/>
-        </p:nvSpPr>
-        <p:spPr>
-          <a:xfrm>
-            <a:off x="1725930" y="3296644"/>
-            <a:ext cx="2912785" cy="470898"/>
-          </a:xfrm>
-          <a:prstGeom prst="rect">
-            <a:avLst/>
-          </a:prstGeom>
-          <a:noFill/>
-        </p:spPr>
-        <p:txBody>
-          <a:bodyPr wrap="none" lIns="137160" tIns="109728" rIns="137160" bIns="109728" rtlCol="0">
-            <a:spAutoFit/>
-          </a:bodyPr>
-          <a:lstStyle/>
-          <a:p>
-            <a:pPr>
-              <a:lnSpc>
-                <a:spcPct val="90000"/>
-              </a:lnSpc>
-              <a:spcAft>
-                <a:spcPts val="450"/>
-              </a:spcAft>
-            </a:pPr>
-            <a:r>
-              <a:rPr lang="en-US" i="1" dirty="0">
-                <a:solidFill>
-                  <a:schemeClr val="bg1"/>
-                </a:solidFill>
-              </a:rPr>
-              <a:t>Go forth and be awesome!</a:t>
-            </a:r>
-          </a:p>
-        </p:txBody>
-      </p:sp>
-      <p:sp>
-        <p:nvSpPr>
-          <p:cNvPr id="7" name="TextBox 6"/>
-          <p:cNvSpPr txBox="1"/>
-          <p:nvPr/>
-        </p:nvSpPr>
-        <p:spPr>
-          <a:xfrm>
-            <a:off x="6795786" y="5084852"/>
-            <a:ext cx="3003707" cy="346249"/>
-          </a:xfrm>
-          <a:prstGeom prst="rect">
-            <a:avLst/>
-          </a:prstGeom>
-          <a:noFill/>
-        </p:spPr>
-        <p:txBody>
-          <a:bodyPr wrap="none" lIns="137160" tIns="109728" rIns="137160" bIns="109728" rtlCol="0">
-            <a:spAutoFit/>
-          </a:bodyPr>
-          <a:lstStyle/>
-          <a:p>
-            <a:pPr>
-              <a:lnSpc>
-                <a:spcPct val="90000"/>
-              </a:lnSpc>
-              <a:spcAft>
-                <a:spcPts val="450"/>
-              </a:spcAft>
-            </a:pPr>
-            <a:r>
-              <a:rPr lang="en-US" sz="900" dirty="0">
-                <a:solidFill>
-                  <a:schemeClr val="bg1"/>
-                </a:solidFill>
-              </a:rPr>
-              <a:t>Image from </a:t>
-            </a:r>
-            <a:r>
-              <a:rPr lang="en-US" sz="900" dirty="0" err="1">
-                <a:solidFill>
-                  <a:schemeClr val="bg1"/>
-                </a:solidFill>
-              </a:rPr>
-              <a:t>Etsy</a:t>
-            </a:r>
-            <a:r>
-              <a:rPr lang="en-US" sz="900" dirty="0">
-                <a:solidFill>
-                  <a:schemeClr val="bg1"/>
-                </a:solidFill>
-              </a:rPr>
-              <a:t> user </a:t>
-            </a:r>
-            <a:r>
-              <a:rPr lang="en-US" sz="900" dirty="0" err="1">
-                <a:solidFill>
-                  <a:schemeClr val="bg1"/>
-                </a:solidFill>
-              </a:rPr>
-              <a:t>Rosewine</a:t>
-            </a:r>
-            <a:r>
-              <a:rPr lang="en-US" sz="900" dirty="0">
-                <a:solidFill>
-                  <a:schemeClr val="bg1"/>
-                </a:solidFill>
-              </a:rPr>
-              <a:t>; used with permission</a:t>
+              <a:t>Metrics</a:t>
             </a:r>
           </a:p>
         </p:txBody>
@@ -9305,7 +9713,7 @@
     </p:spTree>
     <p:extLst>
       <p:ext uri="{BB962C8B-B14F-4D97-AF65-F5344CB8AC3E}">
-        <p14:creationId xmlns:p14="http://schemas.microsoft.com/office/powerpoint/2010/main" val="3243594767"/>
+        <p14:creationId xmlns:p14="http://schemas.microsoft.com/office/powerpoint/2010/main" val="1173523492"/>
       </p:ext>
     </p:extLst>
   </p:cSld>
@@ -9337,7 +9745,13 @@
       </p:grpSpPr>
       <p:sp>
         <p:nvSpPr>
-          <p:cNvPr id="3" name="Title 2"/>
+          <p:cNvPr id="3" name="Title 2">
+            <a:extLst>
+              <a:ext uri="{FF2B5EF4-FFF2-40B4-BE49-F238E27FC236}">
+                <a16:creationId xmlns:a16="http://schemas.microsoft.com/office/drawing/2014/main" id="{1CBE2A49-41D0-7B4B-DB4B-F5CFD6AEA5C3}"/>
+              </a:ext>
+            </a:extLst>
+          </p:cNvPr>
           <p:cNvSpPr>
             <a:spLocks noGrp="1"/>
           </p:cNvSpPr>
@@ -9350,13 +9764,22 @@
           <a:bodyPr/>
           <a:lstStyle/>
           <a:p>
-            <a:endParaRPr lang="en-US" dirty="0"/>
-          </a:p>
-        </p:txBody>
-      </p:sp>
-      <p:sp>
-        <p:nvSpPr>
-          <p:cNvPr id="4" name="Text Placeholder 3"/>
+            <a:r>
+              <a:rPr lang="en-US" dirty="0"/>
+              <a:t>Metrics: Things to measure</a:t>
+            </a:r>
+          </a:p>
+        </p:txBody>
+      </p:sp>
+      <p:sp>
+        <p:nvSpPr>
+          <p:cNvPr id="4" name="Text Placeholder 3">
+            <a:extLst>
+              <a:ext uri="{FF2B5EF4-FFF2-40B4-BE49-F238E27FC236}">
+                <a16:creationId xmlns:a16="http://schemas.microsoft.com/office/drawing/2014/main" id="{40068E3D-668E-A8C4-7E14-0584ADA20A9F}"/>
+              </a:ext>
+            </a:extLst>
+          </p:cNvPr>
           <p:cNvSpPr>
             <a:spLocks noGrp="1"/>
           </p:cNvSpPr>
@@ -9366,8 +9789,8 @@
         </p:nvSpPr>
         <p:spPr>
           <a:xfrm>
-            <a:off x="269239" y="1197324"/>
-            <a:ext cx="11653523" cy="1976888"/>
+            <a:off x="269239" y="1197322"/>
+            <a:ext cx="11653522" cy="1728037"/>
           </a:xfrm>
         </p:spPr>
         <p:txBody>
@@ -9380,7 +9803,236 @@
             </a:pPr>
             <a:r>
               <a:rPr lang="en-US" dirty="0"/>
-              <a:t>Distributed tracing (including across queues):</a:t>
+              <a:t>Most metrics are counters (Counter or </a:t>
+            </a:r>
+            <a:r>
+              <a:rPr lang="en-US" dirty="0" err="1"/>
+              <a:t>UpDownCounter</a:t>
+            </a:r>
+            <a:r>
+              <a:rPr lang="en-US" dirty="0"/>
+              <a:t>)</a:t>
+            </a:r>
+          </a:p>
+          <a:p>
+            <a:pPr marL="457200" indent="-457200">
+              <a:buFontTx/>
+              <a:buChar char="-"/>
+            </a:pPr>
+            <a:r>
+              <a:rPr lang="en-US" dirty="0"/>
+              <a:t>Gauge (when sums don’t make sense, e.g., percentages)</a:t>
+            </a:r>
+          </a:p>
+          <a:p>
+            <a:pPr marL="457200" indent="-457200">
+              <a:buFontTx/>
+              <a:buChar char="-"/>
+            </a:pPr>
+            <a:r>
+              <a:rPr lang="en-US" dirty="0"/>
+              <a:t>Histogram (distributions only)</a:t>
+            </a:r>
+          </a:p>
+        </p:txBody>
+      </p:sp>
+      <p:pic>
+        <p:nvPicPr>
+          <p:cNvPr id="5" name="Picture 4" descr="Good Measure | Funny Clips | Mr Bean Official">
+            <a:extLst>
+              <a:ext uri="{FF2B5EF4-FFF2-40B4-BE49-F238E27FC236}">
+                <a16:creationId xmlns:a16="http://schemas.microsoft.com/office/drawing/2014/main" id="{A66A75A1-268C-CF31-02B7-DB3E595B8E84}"/>
+              </a:ext>
+            </a:extLst>
+          </p:cNvPr>
+          <p:cNvPicPr>
+            <a:picLocks noChangeAspect="1"/>
+          </p:cNvPicPr>
+          <p:nvPr/>
+        </p:nvPicPr>
+        <p:blipFill>
+          <a:blip r:embed="rId2"/>
+          <a:stretch>
+            <a:fillRect/>
+          </a:stretch>
+        </p:blipFill>
+        <p:spPr>
+          <a:xfrm>
+            <a:off x="3290836" y="2933505"/>
+            <a:ext cx="5610328" cy="3155810"/>
+          </a:xfrm>
+          <a:prstGeom prst="rect">
+            <a:avLst/>
+          </a:prstGeom>
+        </p:spPr>
+      </p:pic>
+    </p:spTree>
+    <p:extLst>
+      <p:ext uri="{BB962C8B-B14F-4D97-AF65-F5344CB8AC3E}">
+        <p14:creationId xmlns:p14="http://schemas.microsoft.com/office/powerpoint/2010/main" val="2519512039"/>
+      </p:ext>
+    </p:extLst>
+  </p:cSld>
+  <p:clrMapOvr>
+    <a:masterClrMapping/>
+  </p:clrMapOvr>
+  <p:transition>
+    <p:fade/>
+  </p:transition>
+</p:sld>
+</file>
+
+<file path=ppt/slides/slide26.xml><?xml version="1.0" encoding="utf-8"?>
+<p:sld xmlns:a="http://schemas.openxmlformats.org/drawingml/2006/main" xmlns:r="http://schemas.openxmlformats.org/officeDocument/2006/relationships" xmlns:p="http://schemas.openxmlformats.org/presentationml/2006/main">
+  <p:cSld>
+    <p:spTree>
+      <p:nvGrpSpPr>
+        <p:cNvPr id="1" name="">
+          <a:extLst>
+            <a:ext uri="{FF2B5EF4-FFF2-40B4-BE49-F238E27FC236}">
+              <a16:creationId xmlns:a16="http://schemas.microsoft.com/office/drawing/2014/main" id="{773B1787-5001-9C02-5FF6-B960AD071797}"/>
+            </a:ext>
+          </a:extLst>
+        </p:cNvPr>
+        <p:cNvGrpSpPr/>
+        <p:nvPr/>
+      </p:nvGrpSpPr>
+      <p:grpSpPr>
+        <a:xfrm>
+          <a:off x="0" y="0"/>
+          <a:ext cx="0" cy="0"/>
+          <a:chOff x="0" y="0"/>
+          <a:chExt cx="0" cy="0"/>
+        </a:xfrm>
+      </p:grpSpPr>
+      <p:sp>
+        <p:nvSpPr>
+          <p:cNvPr id="2" name="Title 1">
+            <a:extLst>
+              <a:ext uri="{FF2B5EF4-FFF2-40B4-BE49-F238E27FC236}">
+                <a16:creationId xmlns:a16="http://schemas.microsoft.com/office/drawing/2014/main" id="{11B6068B-344C-F2A3-25D9-605BB5802408}"/>
+              </a:ext>
+            </a:extLst>
+          </p:cNvPr>
+          <p:cNvSpPr>
+            <a:spLocks noGrp="1"/>
+          </p:cNvSpPr>
+          <p:nvPr>
+            <p:ph type="title"/>
+          </p:nvPr>
+        </p:nvSpPr>
+        <p:spPr/>
+        <p:txBody>
+          <a:bodyPr/>
+          <a:lstStyle/>
+          <a:p>
+            <a:r>
+              <a:rPr lang="en-US" dirty="0"/>
+              <a:t>Demo 5: Custom Counter Metric</a:t>
+            </a:r>
+          </a:p>
+        </p:txBody>
+      </p:sp>
+    </p:spTree>
+    <p:extLst>
+      <p:ext uri="{BB962C8B-B14F-4D97-AF65-F5344CB8AC3E}">
+        <p14:creationId xmlns:p14="http://schemas.microsoft.com/office/powerpoint/2010/main" val="2046997055"/>
+      </p:ext>
+    </p:extLst>
+  </p:cSld>
+  <p:clrMapOvr>
+    <a:masterClrMapping/>
+  </p:clrMapOvr>
+  <p:transition>
+    <p:fade/>
+  </p:transition>
+</p:sld>
+</file>
+
+<file path=ppt/slides/slide27.xml><?xml version="1.0" encoding="utf-8"?>
+<p:sld xmlns:a="http://schemas.openxmlformats.org/drawingml/2006/main" xmlns:r="http://schemas.openxmlformats.org/officeDocument/2006/relationships" xmlns:p="http://schemas.openxmlformats.org/presentationml/2006/main">
+  <p:cSld>
+    <p:spTree>
+      <p:nvGrpSpPr>
+        <p:cNvPr id="1" name="">
+          <a:extLst>
+            <a:ext uri="{FF2B5EF4-FFF2-40B4-BE49-F238E27FC236}">
+              <a16:creationId xmlns:a16="http://schemas.microsoft.com/office/drawing/2014/main" id="{5025409F-9EC3-3F77-2FBD-0B7CB269C159}"/>
+            </a:ext>
+          </a:extLst>
+        </p:cNvPr>
+        <p:cNvGrpSpPr/>
+        <p:nvPr/>
+      </p:nvGrpSpPr>
+      <p:grpSpPr>
+        <a:xfrm>
+          <a:off x="0" y="0"/>
+          <a:ext cx="0" cy="0"/>
+          <a:chOff x="0" y="0"/>
+          <a:chExt cx="0" cy="0"/>
+        </a:xfrm>
+      </p:grpSpPr>
+      <p:sp>
+        <p:nvSpPr>
+          <p:cNvPr id="3" name="Title 2">
+            <a:extLst>
+              <a:ext uri="{FF2B5EF4-FFF2-40B4-BE49-F238E27FC236}">
+                <a16:creationId xmlns:a16="http://schemas.microsoft.com/office/drawing/2014/main" id="{73A232CF-AE47-373D-413B-EA46A95FFA09}"/>
+              </a:ext>
+            </a:extLst>
+          </p:cNvPr>
+          <p:cNvSpPr>
+            <a:spLocks noGrp="1"/>
+          </p:cNvSpPr>
+          <p:nvPr>
+            <p:ph type="title"/>
+          </p:nvPr>
+        </p:nvSpPr>
+        <p:spPr/>
+        <p:txBody>
+          <a:bodyPr/>
+          <a:lstStyle/>
+          <a:p>
+            <a:r>
+              <a:rPr lang="en-US" dirty="0"/>
+              <a:t>Metrics: A word of warning</a:t>
+            </a:r>
+          </a:p>
+        </p:txBody>
+      </p:sp>
+      <p:sp>
+        <p:nvSpPr>
+          <p:cNvPr id="4" name="Text Placeholder 3">
+            <a:extLst>
+              <a:ext uri="{FF2B5EF4-FFF2-40B4-BE49-F238E27FC236}">
+                <a16:creationId xmlns:a16="http://schemas.microsoft.com/office/drawing/2014/main" id="{389016A8-1C90-F59C-BD51-87CC2263BB2D}"/>
+              </a:ext>
+            </a:extLst>
+          </p:cNvPr>
+          <p:cNvSpPr>
+            <a:spLocks noGrp="1"/>
+          </p:cNvSpPr>
+          <p:nvPr>
+            <p:ph type="body" sz="quarter" idx="10"/>
+          </p:nvPr>
+        </p:nvSpPr>
+        <p:spPr>
+          <a:xfrm>
+            <a:off x="269239" y="1197322"/>
+            <a:ext cx="11653522" cy="2225738"/>
+          </a:xfrm>
+        </p:spPr>
+        <p:txBody>
+          <a:bodyPr/>
+          <a:lstStyle/>
+          <a:p>
+            <a:pPr marL="457200" indent="-457200">
+              <a:buFontTx/>
+              <a:buChar char="-"/>
+            </a:pPr>
+            <a:r>
+              <a:rPr lang="en-US" dirty="0"/>
+              <a:t>Metrics have dimensions.</a:t>
             </a:r>
           </a:p>
           <a:p>
@@ -9389,13 +10041,239 @@
               <a:buChar char="-"/>
             </a:pPr>
             <a:r>
-              <a:rPr lang="en-US" dirty="0">
-                <a:hlinkClick r:id="rId3"/>
-              </a:rPr>
-              <a:t>https://tinyurl.com/OTEL-RabbitMQ</a:t>
-            </a:r>
-            <a:endParaRPr lang="en-US" dirty="0"/>
-          </a:p>
+              <a:rPr lang="en-US" dirty="0"/>
+              <a:t>Must be a fixed (and small) number of values!</a:t>
+            </a:r>
+          </a:p>
+          <a:p>
+            <a:pPr marL="796926" lvl="1" indent="-457200">
+              <a:buFontTx/>
+              <a:buChar char="-"/>
+            </a:pPr>
+            <a:r>
+              <a:rPr lang="en-US" dirty="0"/>
+              <a:t>Stored as one metric </a:t>
+            </a:r>
+            <a:r>
+              <a:rPr lang="en-US" i="1" dirty="0"/>
+              <a:t>per unique set of values across all dimensions</a:t>
+            </a:r>
+          </a:p>
+          <a:p>
+            <a:pPr marL="796926" lvl="1" indent="-457200">
+              <a:buFontTx/>
+              <a:buChar char="-"/>
+            </a:pPr>
+            <a:r>
+              <a:rPr lang="en-US" dirty="0"/>
+              <a:t>This gets expensive, </a:t>
+            </a:r>
+            <a:r>
+              <a:rPr lang="en-US" i="1" dirty="0"/>
+              <a:t>fast!</a:t>
+            </a:r>
+          </a:p>
+          <a:p>
+            <a:pPr marL="796926" lvl="1" indent="-457200">
+              <a:buFontTx/>
+              <a:buChar char="-"/>
+            </a:pPr>
+            <a:r>
+              <a:rPr lang="en-US" dirty="0"/>
+              <a:t>Use tags instead, if possible.</a:t>
+            </a:r>
+          </a:p>
+        </p:txBody>
+      </p:sp>
+      <p:pic>
+        <p:nvPicPr>
+          <p:cNvPr id="2" name="Picture 1" descr="Money Burning GIFs | Tenor">
+            <a:extLst>
+              <a:ext uri="{FF2B5EF4-FFF2-40B4-BE49-F238E27FC236}">
+                <a16:creationId xmlns:a16="http://schemas.microsoft.com/office/drawing/2014/main" id="{38B33FA3-F70F-CBBF-A02C-7C8CD71A1450}"/>
+              </a:ext>
+            </a:extLst>
+          </p:cNvPr>
+          <p:cNvPicPr>
+            <a:picLocks noChangeAspect="1"/>
+          </p:cNvPicPr>
+          <p:nvPr/>
+        </p:nvPicPr>
+        <p:blipFill>
+          <a:blip r:embed="rId2"/>
+          <a:stretch>
+            <a:fillRect/>
+          </a:stretch>
+        </p:blipFill>
+        <p:spPr>
+          <a:xfrm>
+            <a:off x="5324632" y="2801844"/>
+            <a:ext cx="3632793" cy="2742832"/>
+          </a:xfrm>
+          <a:prstGeom prst="rect">
+            <a:avLst/>
+          </a:prstGeom>
+        </p:spPr>
+      </p:pic>
+    </p:spTree>
+    <p:extLst>
+      <p:ext uri="{BB962C8B-B14F-4D97-AF65-F5344CB8AC3E}">
+        <p14:creationId xmlns:p14="http://schemas.microsoft.com/office/powerpoint/2010/main" val="2955008587"/>
+      </p:ext>
+    </p:extLst>
+  </p:cSld>
+  <p:clrMapOvr>
+    <a:masterClrMapping/>
+  </p:clrMapOvr>
+  <p:transition>
+    <p:fade/>
+  </p:transition>
+</p:sld>
+</file>
+
+<file path=ppt/slides/slide28.xml><?xml version="1.0" encoding="utf-8"?>
+<p:sld xmlns:a="http://schemas.openxmlformats.org/drawingml/2006/main" xmlns:r="http://schemas.openxmlformats.org/officeDocument/2006/relationships" xmlns:p="http://schemas.openxmlformats.org/presentationml/2006/main">
+  <p:cSld>
+    <p:spTree>
+      <p:nvGrpSpPr>
+        <p:cNvPr id="1" name="">
+          <a:extLst>
+            <a:ext uri="{FF2B5EF4-FFF2-40B4-BE49-F238E27FC236}">
+              <a16:creationId xmlns:a16="http://schemas.microsoft.com/office/drawing/2014/main" id="{5757404E-B4EC-4DC0-1629-1B20E4E313DA}"/>
+            </a:ext>
+          </a:extLst>
+        </p:cNvPr>
+        <p:cNvGrpSpPr/>
+        <p:nvPr/>
+      </p:nvGrpSpPr>
+      <p:grpSpPr>
+        <a:xfrm>
+          <a:off x="0" y="0"/>
+          <a:ext cx="0" cy="0"/>
+          <a:chOff x="0" y="0"/>
+          <a:chExt cx="0" cy="0"/>
+        </a:xfrm>
+      </p:grpSpPr>
+      <p:sp>
+        <p:nvSpPr>
+          <p:cNvPr id="2" name="Title 1">
+            <a:extLst>
+              <a:ext uri="{FF2B5EF4-FFF2-40B4-BE49-F238E27FC236}">
+                <a16:creationId xmlns:a16="http://schemas.microsoft.com/office/drawing/2014/main" id="{C49A210C-4D65-C6A1-58D3-FA6BBD338216}"/>
+              </a:ext>
+            </a:extLst>
+          </p:cNvPr>
+          <p:cNvSpPr>
+            <a:spLocks noGrp="1"/>
+          </p:cNvSpPr>
+          <p:nvPr>
+            <p:ph type="title"/>
+          </p:nvPr>
+        </p:nvSpPr>
+        <p:spPr/>
+        <p:txBody>
+          <a:bodyPr/>
+          <a:lstStyle/>
+          <a:p>
+            <a:r>
+              <a:rPr lang="en-US" dirty="0"/>
+              <a:t>Traces</a:t>
+            </a:r>
+          </a:p>
+        </p:txBody>
+      </p:sp>
+    </p:spTree>
+    <p:extLst>
+      <p:ext uri="{BB962C8B-B14F-4D97-AF65-F5344CB8AC3E}">
+        <p14:creationId xmlns:p14="http://schemas.microsoft.com/office/powerpoint/2010/main" val="1444560797"/>
+      </p:ext>
+    </p:extLst>
+  </p:cSld>
+  <p:clrMapOvr>
+    <a:masterClrMapping/>
+  </p:clrMapOvr>
+  <p:transition>
+    <p:fade/>
+  </p:transition>
+</p:sld>
+</file>
+
+<file path=ppt/slides/slide29.xml><?xml version="1.0" encoding="utf-8"?>
+<p:sld xmlns:a="http://schemas.openxmlformats.org/drawingml/2006/main" xmlns:r="http://schemas.openxmlformats.org/officeDocument/2006/relationships" xmlns:p="http://schemas.openxmlformats.org/presentationml/2006/main">
+  <p:cSld>
+    <p:spTree>
+      <p:nvGrpSpPr>
+        <p:cNvPr id="1" name="">
+          <a:extLst>
+            <a:ext uri="{FF2B5EF4-FFF2-40B4-BE49-F238E27FC236}">
+              <a16:creationId xmlns:a16="http://schemas.microsoft.com/office/drawing/2014/main" id="{75E1BBBA-1879-7E65-B873-8423F361D388}"/>
+            </a:ext>
+          </a:extLst>
+        </p:cNvPr>
+        <p:cNvGrpSpPr/>
+        <p:nvPr/>
+      </p:nvGrpSpPr>
+      <p:grpSpPr>
+        <a:xfrm>
+          <a:off x="0" y="0"/>
+          <a:ext cx="0" cy="0"/>
+          <a:chOff x="0" y="0"/>
+          <a:chExt cx="0" cy="0"/>
+        </a:xfrm>
+      </p:grpSpPr>
+      <p:sp>
+        <p:nvSpPr>
+          <p:cNvPr id="3" name="Title 2">
+            <a:extLst>
+              <a:ext uri="{FF2B5EF4-FFF2-40B4-BE49-F238E27FC236}">
+                <a16:creationId xmlns:a16="http://schemas.microsoft.com/office/drawing/2014/main" id="{B79A729C-6940-2FA2-0A0F-AF5A6DAE0C51}"/>
+              </a:ext>
+            </a:extLst>
+          </p:cNvPr>
+          <p:cNvSpPr>
+            <a:spLocks noGrp="1"/>
+          </p:cNvSpPr>
+          <p:nvPr>
+            <p:ph type="title"/>
+          </p:nvPr>
+        </p:nvSpPr>
+        <p:spPr/>
+        <p:txBody>
+          <a:bodyPr/>
+          <a:lstStyle/>
+          <a:p>
+            <a:r>
+              <a:rPr lang="en-US" dirty="0"/>
+              <a:t>Traces == Activities == Spans</a:t>
+            </a:r>
+          </a:p>
+        </p:txBody>
+      </p:sp>
+      <p:sp>
+        <p:nvSpPr>
+          <p:cNvPr id="4" name="Text Placeholder 3">
+            <a:extLst>
+              <a:ext uri="{FF2B5EF4-FFF2-40B4-BE49-F238E27FC236}">
+                <a16:creationId xmlns:a16="http://schemas.microsoft.com/office/drawing/2014/main" id="{F640023C-B728-568F-C50E-41CE3A885179}"/>
+              </a:ext>
+            </a:extLst>
+          </p:cNvPr>
+          <p:cNvSpPr>
+            <a:spLocks noGrp="1"/>
+          </p:cNvSpPr>
+          <p:nvPr>
+            <p:ph type="body" sz="quarter" idx="10"/>
+          </p:nvPr>
+        </p:nvSpPr>
+        <p:spPr>
+          <a:xfrm>
+            <a:off x="269239" y="1197322"/>
+            <a:ext cx="11653522" cy="2176109"/>
+          </a:xfrm>
+        </p:spPr>
+        <p:txBody>
+          <a:bodyPr/>
+          <a:lstStyle/>
           <a:p>
             <a:pPr marL="457200" indent="-457200">
               <a:buFontTx/>
@@ -9403,33 +10281,27 @@
             </a:pPr>
             <a:r>
               <a:rPr lang="en-US" dirty="0"/>
-              <a:t>Pitfall:</a:t>
-            </a:r>
-          </a:p>
-          <a:p>
-            <a:pPr marL="796926" lvl="1" indent="-457200">
+              <a:t>Traces also support tags.</a:t>
+            </a:r>
+          </a:p>
+          <a:p>
+            <a:pPr marL="457200" indent="-457200">
               <a:buFontTx/>
               <a:buChar char="-"/>
             </a:pPr>
             <a:r>
               <a:rPr lang="en-US" dirty="0"/>
-              <a:t>Know your backend (e.g., </a:t>
-            </a:r>
-            <a:r>
-              <a:rPr lang="en-US" dirty="0" err="1"/>
-              <a:t>Graylog’s</a:t>
-            </a:r>
-            <a:r>
-              <a:rPr lang="en-US" dirty="0"/>
-              <a:t> </a:t>
-            </a:r>
-            <a:r>
-              <a:rPr lang="en-US" dirty="0" err="1"/>
-              <a:t>ElasticSearch</a:t>
-            </a:r>
-            <a:r>
-              <a:rPr lang="en-US" dirty="0"/>
-              <a:t> index typing)</a:t>
+              <a:t>They can be completed successfully or with error.</a:t>
+            </a:r>
+          </a:p>
+          <a:p>
+            <a:pPr marL="457200" indent="-457200">
+              <a:buFontTx/>
+              <a:buChar char="-"/>
+            </a:pPr>
+            <a:r>
+              <a:rPr lang="en-US" dirty="0"/>
+              <a:t>They also have “events” which can happen within the trace, e.g., exceptions.</a:t>
             </a:r>
           </a:p>
         </p:txBody>
@@ -9437,7 +10309,7 @@
     </p:spTree>
     <p:extLst>
       <p:ext uri="{BB962C8B-B14F-4D97-AF65-F5344CB8AC3E}">
-        <p14:creationId xmlns:p14="http://schemas.microsoft.com/office/powerpoint/2010/main" val="3482452174"/>
+        <p14:creationId xmlns:p14="http://schemas.microsoft.com/office/powerpoint/2010/main" val="2483157513"/>
       </p:ext>
     </p:extLst>
   </p:cSld>
@@ -9512,14 +10384,644 @@
   <p:clrMapOvr>
     <a:masterClrMapping/>
   </p:clrMapOvr>
-  <mc:AlternateContent xmlns:mc="http://schemas.openxmlformats.org/markup-compatibility/2006">
-    <mc:Choice xmlns:p14="http://schemas.microsoft.com/office/powerpoint/2010/main" Requires="p14">
+  <mc:AlternateContent xmlns:mc="http://schemas.openxmlformats.org/markup-compatibility/2006" xmlns:p14="http://schemas.microsoft.com/office/powerpoint/2010/main">
+    <mc:Choice Requires="p14">
       <p:transition p14:dur="0"/>
     </mc:Choice>
-    <mc:Fallback>
+    <mc:Fallback xmlns="">
       <p:transition/>
     </mc:Fallback>
   </mc:AlternateContent>
+</p:sld>
+</file>
+
+<file path=ppt/slides/slide30.xml><?xml version="1.0" encoding="utf-8"?>
+<p:sld xmlns:a="http://schemas.openxmlformats.org/drawingml/2006/main" xmlns:r="http://schemas.openxmlformats.org/officeDocument/2006/relationships" xmlns:p="http://schemas.openxmlformats.org/presentationml/2006/main">
+  <p:cSld>
+    <p:spTree>
+      <p:nvGrpSpPr>
+        <p:cNvPr id="1" name="">
+          <a:extLst>
+            <a:ext uri="{FF2B5EF4-FFF2-40B4-BE49-F238E27FC236}">
+              <a16:creationId xmlns:a16="http://schemas.microsoft.com/office/drawing/2014/main" id="{4793763E-43F5-C6EF-0476-DD37884B0C6F}"/>
+            </a:ext>
+          </a:extLst>
+        </p:cNvPr>
+        <p:cNvGrpSpPr/>
+        <p:nvPr/>
+      </p:nvGrpSpPr>
+      <p:grpSpPr>
+        <a:xfrm>
+          <a:off x="0" y="0"/>
+          <a:ext cx="0" cy="0"/>
+          <a:chOff x="0" y="0"/>
+          <a:chExt cx="0" cy="0"/>
+        </a:xfrm>
+      </p:grpSpPr>
+      <p:sp>
+        <p:nvSpPr>
+          <p:cNvPr id="2" name="Title 1">
+            <a:extLst>
+              <a:ext uri="{FF2B5EF4-FFF2-40B4-BE49-F238E27FC236}">
+                <a16:creationId xmlns:a16="http://schemas.microsoft.com/office/drawing/2014/main" id="{B7A45074-6122-68AE-B386-2C795E16B5AA}"/>
+              </a:ext>
+            </a:extLst>
+          </p:cNvPr>
+          <p:cNvSpPr>
+            <a:spLocks noGrp="1"/>
+          </p:cNvSpPr>
+          <p:nvPr>
+            <p:ph type="title"/>
+          </p:nvPr>
+        </p:nvSpPr>
+        <p:spPr/>
+        <p:txBody>
+          <a:bodyPr/>
+          <a:lstStyle/>
+          <a:p>
+            <a:r>
+              <a:rPr lang="en-US" dirty="0"/>
+              <a:t>Demo 6: Custom Traces</a:t>
+            </a:r>
+          </a:p>
+        </p:txBody>
+      </p:sp>
+    </p:spTree>
+    <p:extLst>
+      <p:ext uri="{BB962C8B-B14F-4D97-AF65-F5344CB8AC3E}">
+        <p14:creationId xmlns:p14="http://schemas.microsoft.com/office/powerpoint/2010/main" val="3013190429"/>
+      </p:ext>
+    </p:extLst>
+  </p:cSld>
+  <p:clrMapOvr>
+    <a:masterClrMapping/>
+  </p:clrMapOvr>
+  <p:transition>
+    <p:fade/>
+  </p:transition>
+</p:sld>
+</file>
+
+<file path=ppt/slides/slide31.xml><?xml version="1.0" encoding="utf-8"?>
+<p:sld xmlns:a="http://schemas.openxmlformats.org/drawingml/2006/main" xmlns:r="http://schemas.openxmlformats.org/officeDocument/2006/relationships" xmlns:p="http://schemas.openxmlformats.org/presentationml/2006/main">
+  <p:cSld>
+    <p:spTree>
+      <p:nvGrpSpPr>
+        <p:cNvPr id="1" name=""/>
+        <p:cNvGrpSpPr/>
+        <p:nvPr/>
+      </p:nvGrpSpPr>
+      <p:grpSpPr>
+        <a:xfrm>
+          <a:off x="0" y="0"/>
+          <a:ext cx="0" cy="0"/>
+          <a:chOff x="0" y="0"/>
+          <a:chExt cx="0" cy="0"/>
+        </a:xfrm>
+      </p:grpSpPr>
+      <p:sp>
+        <p:nvSpPr>
+          <p:cNvPr id="3" name="Title 2">
+            <a:extLst>
+              <a:ext uri="{FF2B5EF4-FFF2-40B4-BE49-F238E27FC236}">
+                <a16:creationId xmlns:a16="http://schemas.microsoft.com/office/drawing/2014/main" id="{BFDCD124-3099-2089-0DB1-915D878BE9E0}"/>
+              </a:ext>
+            </a:extLst>
+          </p:cNvPr>
+          <p:cNvSpPr>
+            <a:spLocks noGrp="1"/>
+          </p:cNvSpPr>
+          <p:nvPr>
+            <p:ph type="title"/>
+          </p:nvPr>
+        </p:nvSpPr>
+        <p:spPr/>
+        <p:txBody>
+          <a:bodyPr/>
+          <a:lstStyle/>
+          <a:p>
+            <a:r>
+              <a:rPr lang="en-US" dirty="0"/>
+              <a:t>Distributed Traces</a:t>
+            </a:r>
+          </a:p>
+        </p:txBody>
+      </p:sp>
+      <p:sp>
+        <p:nvSpPr>
+          <p:cNvPr id="4" name="Text Placeholder 3">
+            <a:extLst>
+              <a:ext uri="{FF2B5EF4-FFF2-40B4-BE49-F238E27FC236}">
+                <a16:creationId xmlns:a16="http://schemas.microsoft.com/office/drawing/2014/main" id="{18CA1CD6-1635-FE2A-D45B-214BCF41812C}"/>
+              </a:ext>
+            </a:extLst>
+          </p:cNvPr>
+          <p:cNvSpPr>
+            <a:spLocks noGrp="1"/>
+          </p:cNvSpPr>
+          <p:nvPr>
+            <p:ph type="body" sz="quarter" idx="10"/>
+          </p:nvPr>
+        </p:nvSpPr>
+        <p:spPr>
+          <a:xfrm>
+            <a:off x="269239" y="1197322"/>
+            <a:ext cx="11653522" cy="632737"/>
+          </a:xfrm>
+        </p:spPr>
+        <p:txBody>
+          <a:bodyPr/>
+          <a:lstStyle/>
+          <a:p>
+            <a:r>
+              <a:rPr lang="en-US" dirty="0"/>
+              <a:t>Kind: Internal</a:t>
+            </a:r>
+            <a:r>
+              <a:rPr lang="en-US"/>
+              <a:t>, Client, Server</a:t>
+            </a:r>
+          </a:p>
+        </p:txBody>
+      </p:sp>
+    </p:spTree>
+    <p:extLst>
+      <p:ext uri="{BB962C8B-B14F-4D97-AF65-F5344CB8AC3E}">
+        <p14:creationId xmlns:p14="http://schemas.microsoft.com/office/powerpoint/2010/main" val="2813034028"/>
+      </p:ext>
+    </p:extLst>
+  </p:cSld>
+  <p:clrMapOvr>
+    <a:masterClrMapping/>
+  </p:clrMapOvr>
+  <p:transition>
+    <p:fade/>
+  </p:transition>
+</p:sld>
+</file>
+
+<file path=ppt/slides/slide32.xml><?xml version="1.0" encoding="utf-8"?>
+<p:sld xmlns:a="http://schemas.openxmlformats.org/drawingml/2006/main" xmlns:r="http://schemas.openxmlformats.org/officeDocument/2006/relationships" xmlns:p="http://schemas.openxmlformats.org/presentationml/2006/main">
+  <p:cSld>
+    <p:spTree>
+      <p:nvGrpSpPr>
+        <p:cNvPr id="1" name="">
+          <a:extLst>
+            <a:ext uri="{FF2B5EF4-FFF2-40B4-BE49-F238E27FC236}">
+              <a16:creationId xmlns:a16="http://schemas.microsoft.com/office/drawing/2014/main" id="{6ECF0FA9-4DDF-9164-78AF-4AE7696D002F}"/>
+            </a:ext>
+          </a:extLst>
+        </p:cNvPr>
+        <p:cNvGrpSpPr/>
+        <p:nvPr/>
+      </p:nvGrpSpPr>
+      <p:grpSpPr>
+        <a:xfrm>
+          <a:off x="0" y="0"/>
+          <a:ext cx="0" cy="0"/>
+          <a:chOff x="0" y="0"/>
+          <a:chExt cx="0" cy="0"/>
+        </a:xfrm>
+      </p:grpSpPr>
+      <p:sp>
+        <p:nvSpPr>
+          <p:cNvPr id="2" name="Title 1">
+            <a:extLst>
+              <a:ext uri="{FF2B5EF4-FFF2-40B4-BE49-F238E27FC236}">
+                <a16:creationId xmlns:a16="http://schemas.microsoft.com/office/drawing/2014/main" id="{FDC5A2C0-FDBA-990F-F7D7-510ECAE0634E}"/>
+              </a:ext>
+            </a:extLst>
+          </p:cNvPr>
+          <p:cNvSpPr>
+            <a:spLocks noGrp="1"/>
+          </p:cNvSpPr>
+          <p:nvPr>
+            <p:ph type="title"/>
+          </p:nvPr>
+        </p:nvSpPr>
+        <p:spPr/>
+        <p:txBody>
+          <a:bodyPr/>
+          <a:lstStyle/>
+          <a:p>
+            <a:r>
+              <a:rPr lang="en-US" dirty="0"/>
+              <a:t>Demo 7: Distributed Traces</a:t>
+            </a:r>
+          </a:p>
+        </p:txBody>
+      </p:sp>
+    </p:spTree>
+    <p:extLst>
+      <p:ext uri="{BB962C8B-B14F-4D97-AF65-F5344CB8AC3E}">
+        <p14:creationId xmlns:p14="http://schemas.microsoft.com/office/powerpoint/2010/main" val="1759432130"/>
+      </p:ext>
+    </p:extLst>
+  </p:cSld>
+  <p:clrMapOvr>
+    <a:masterClrMapping/>
+  </p:clrMapOvr>
+  <p:transition>
+    <p:fade/>
+  </p:transition>
+</p:sld>
+</file>
+
+<file path=ppt/slides/slide33.xml><?xml version="1.0" encoding="utf-8"?>
+<p:sld xmlns:a="http://schemas.openxmlformats.org/drawingml/2006/main" xmlns:r="http://schemas.openxmlformats.org/officeDocument/2006/relationships" xmlns:p="http://schemas.openxmlformats.org/presentationml/2006/main">
+  <p:cSld>
+    <p:spTree>
+      <p:nvGrpSpPr>
+        <p:cNvPr id="1" name="">
+          <a:extLst>
+            <a:ext uri="{FF2B5EF4-FFF2-40B4-BE49-F238E27FC236}">
+              <a16:creationId xmlns:a16="http://schemas.microsoft.com/office/drawing/2014/main" id="{0A1BF229-E76D-15B8-6E38-E38D1B1771C4}"/>
+            </a:ext>
+          </a:extLst>
+        </p:cNvPr>
+        <p:cNvGrpSpPr/>
+        <p:nvPr/>
+      </p:nvGrpSpPr>
+      <p:grpSpPr>
+        <a:xfrm>
+          <a:off x="0" y="0"/>
+          <a:ext cx="0" cy="0"/>
+          <a:chOff x="0" y="0"/>
+          <a:chExt cx="0" cy="0"/>
+        </a:xfrm>
+      </p:grpSpPr>
+      <p:sp>
+        <p:nvSpPr>
+          <p:cNvPr id="2" name="Title 1">
+            <a:extLst>
+              <a:ext uri="{FF2B5EF4-FFF2-40B4-BE49-F238E27FC236}">
+                <a16:creationId xmlns:a16="http://schemas.microsoft.com/office/drawing/2014/main" id="{7741CA4A-099B-9628-304A-D0EEEF8C04DE}"/>
+              </a:ext>
+            </a:extLst>
+          </p:cNvPr>
+          <p:cNvSpPr>
+            <a:spLocks noGrp="1"/>
+          </p:cNvSpPr>
+          <p:nvPr>
+            <p:ph type="title"/>
+          </p:nvPr>
+        </p:nvSpPr>
+        <p:spPr/>
+        <p:txBody>
+          <a:bodyPr/>
+          <a:lstStyle/>
+          <a:p>
+            <a:r>
+              <a:rPr lang="en-US" dirty="0"/>
+              <a:t>Demo 6: Custom Traces</a:t>
+            </a:r>
+          </a:p>
+        </p:txBody>
+      </p:sp>
+    </p:spTree>
+    <p:extLst>
+      <p:ext uri="{BB962C8B-B14F-4D97-AF65-F5344CB8AC3E}">
+        <p14:creationId xmlns:p14="http://schemas.microsoft.com/office/powerpoint/2010/main" val="104124698"/>
+      </p:ext>
+    </p:extLst>
+  </p:cSld>
+  <p:clrMapOvr>
+    <a:masterClrMapping/>
+  </p:clrMapOvr>
+  <p:transition>
+    <p:fade/>
+  </p:transition>
+</p:sld>
+</file>
+
+<file path=ppt/slides/slide34.xml><?xml version="1.0" encoding="utf-8"?>
+<p:sld xmlns:a="http://schemas.openxmlformats.org/drawingml/2006/main" xmlns:r="http://schemas.openxmlformats.org/officeDocument/2006/relationships" xmlns:p="http://schemas.openxmlformats.org/presentationml/2006/main">
+  <p:cSld>
+    <p:spTree>
+      <p:nvGrpSpPr>
+        <p:cNvPr id="1" name=""/>
+        <p:cNvGrpSpPr/>
+        <p:nvPr/>
+      </p:nvGrpSpPr>
+      <p:grpSpPr>
+        <a:xfrm>
+          <a:off x="0" y="0"/>
+          <a:ext cx="0" cy="0"/>
+          <a:chOff x="0" y="0"/>
+          <a:chExt cx="0" cy="0"/>
+        </a:xfrm>
+      </p:grpSpPr>
+      <p:sp>
+        <p:nvSpPr>
+          <p:cNvPr id="4" name="Title 3"/>
+          <p:cNvSpPr>
+            <a:spLocks noGrp="1"/>
+          </p:cNvSpPr>
+          <p:nvPr>
+            <p:ph type="title"/>
+          </p:nvPr>
+        </p:nvSpPr>
+        <p:spPr/>
+        <p:txBody>
+          <a:bodyPr/>
+          <a:lstStyle/>
+          <a:p>
+            <a:r>
+              <a:rPr lang="en-US" dirty="0"/>
+              <a:t>Q&amp;A</a:t>
+            </a:r>
+          </a:p>
+        </p:txBody>
+      </p:sp>
+      <p:pic>
+        <p:nvPicPr>
+          <p:cNvPr id="5" name="Picture 4"/>
+          <p:cNvPicPr>
+            <a:picLocks noChangeAspect="1"/>
+          </p:cNvPicPr>
+          <p:nvPr/>
+        </p:nvPicPr>
+        <p:blipFill>
+          <a:blip r:embed="rId3" cstate="print">
+            <a:extLst>
+              <a:ext uri="{28A0092B-C50C-407E-A947-70E740481C1C}">
+                <a14:useLocalDpi xmlns:a14="http://schemas.microsoft.com/office/drawing/2010/main" val="0"/>
+              </a:ext>
+            </a:extLst>
+          </a:blip>
+          <a:stretch>
+            <a:fillRect/>
+          </a:stretch>
+        </p:blipFill>
+        <p:spPr>
+          <a:xfrm>
+            <a:off x="6724529" y="1103070"/>
+            <a:ext cx="3129100" cy="3981780"/>
+          </a:xfrm>
+          <a:prstGeom prst="rect">
+            <a:avLst/>
+          </a:prstGeom>
+        </p:spPr>
+      </p:pic>
+      <p:sp>
+        <p:nvSpPr>
+          <p:cNvPr id="6" name="TextBox 5"/>
+          <p:cNvSpPr txBox="1"/>
+          <p:nvPr/>
+        </p:nvSpPr>
+        <p:spPr>
+          <a:xfrm>
+            <a:off x="1725930" y="3296644"/>
+            <a:ext cx="2912785" cy="470898"/>
+          </a:xfrm>
+          <a:prstGeom prst="rect">
+            <a:avLst/>
+          </a:prstGeom>
+          <a:noFill/>
+        </p:spPr>
+        <p:txBody>
+          <a:bodyPr wrap="none" lIns="137160" tIns="109728" rIns="137160" bIns="109728" rtlCol="0">
+            <a:spAutoFit/>
+          </a:bodyPr>
+          <a:lstStyle/>
+          <a:p>
+            <a:pPr>
+              <a:lnSpc>
+                <a:spcPct val="90000"/>
+              </a:lnSpc>
+              <a:spcAft>
+                <a:spcPts val="450"/>
+              </a:spcAft>
+            </a:pPr>
+            <a:r>
+              <a:rPr lang="en-US" i="1" dirty="0">
+                <a:solidFill>
+                  <a:schemeClr val="bg1"/>
+                </a:solidFill>
+              </a:rPr>
+              <a:t>Go forth and be awesome!</a:t>
+            </a:r>
+          </a:p>
+        </p:txBody>
+      </p:sp>
+      <p:sp>
+        <p:nvSpPr>
+          <p:cNvPr id="7" name="TextBox 6"/>
+          <p:cNvSpPr txBox="1"/>
+          <p:nvPr/>
+        </p:nvSpPr>
+        <p:spPr>
+          <a:xfrm>
+            <a:off x="6795786" y="5084852"/>
+            <a:ext cx="3003707" cy="346249"/>
+          </a:xfrm>
+          <a:prstGeom prst="rect">
+            <a:avLst/>
+          </a:prstGeom>
+          <a:noFill/>
+        </p:spPr>
+        <p:txBody>
+          <a:bodyPr wrap="none" lIns="137160" tIns="109728" rIns="137160" bIns="109728" rtlCol="0">
+            <a:spAutoFit/>
+          </a:bodyPr>
+          <a:lstStyle/>
+          <a:p>
+            <a:pPr>
+              <a:lnSpc>
+                <a:spcPct val="90000"/>
+              </a:lnSpc>
+              <a:spcAft>
+                <a:spcPts val="450"/>
+              </a:spcAft>
+            </a:pPr>
+            <a:r>
+              <a:rPr lang="en-US" sz="900" dirty="0">
+                <a:solidFill>
+                  <a:schemeClr val="bg1"/>
+                </a:solidFill>
+              </a:rPr>
+              <a:t>Image from </a:t>
+            </a:r>
+            <a:r>
+              <a:rPr lang="en-US" sz="900" dirty="0" err="1">
+                <a:solidFill>
+                  <a:schemeClr val="bg1"/>
+                </a:solidFill>
+              </a:rPr>
+              <a:t>Etsy</a:t>
+            </a:r>
+            <a:r>
+              <a:rPr lang="en-US" sz="900" dirty="0">
+                <a:solidFill>
+                  <a:schemeClr val="bg1"/>
+                </a:solidFill>
+              </a:rPr>
+              <a:t> user </a:t>
+            </a:r>
+            <a:r>
+              <a:rPr lang="en-US" sz="900" dirty="0" err="1">
+                <a:solidFill>
+                  <a:schemeClr val="bg1"/>
+                </a:solidFill>
+              </a:rPr>
+              <a:t>Rosewine</a:t>
+            </a:r>
+            <a:r>
+              <a:rPr lang="en-US" sz="900" dirty="0">
+                <a:solidFill>
+                  <a:schemeClr val="bg1"/>
+                </a:solidFill>
+              </a:rPr>
+              <a:t>; used with permission</a:t>
+            </a:r>
+          </a:p>
+        </p:txBody>
+      </p:sp>
+    </p:spTree>
+    <p:extLst>
+      <p:ext uri="{BB962C8B-B14F-4D97-AF65-F5344CB8AC3E}">
+        <p14:creationId xmlns:p14="http://schemas.microsoft.com/office/powerpoint/2010/main" val="3243594767"/>
+      </p:ext>
+    </p:extLst>
+  </p:cSld>
+  <p:clrMapOvr>
+    <a:masterClrMapping/>
+  </p:clrMapOvr>
+  <p:transition>
+    <p:fade/>
+  </p:transition>
+</p:sld>
+</file>
+
+<file path=ppt/slides/slide35.xml><?xml version="1.0" encoding="utf-8"?>
+<p:sld xmlns:a="http://schemas.openxmlformats.org/drawingml/2006/main" xmlns:r="http://schemas.openxmlformats.org/officeDocument/2006/relationships" xmlns:p="http://schemas.openxmlformats.org/presentationml/2006/main">
+  <p:cSld>
+    <p:spTree>
+      <p:nvGrpSpPr>
+        <p:cNvPr id="1" name=""/>
+        <p:cNvGrpSpPr/>
+        <p:nvPr/>
+      </p:nvGrpSpPr>
+      <p:grpSpPr>
+        <a:xfrm>
+          <a:off x="0" y="0"/>
+          <a:ext cx="0" cy="0"/>
+          <a:chOff x="0" y="0"/>
+          <a:chExt cx="0" cy="0"/>
+        </a:xfrm>
+      </p:grpSpPr>
+      <p:sp>
+        <p:nvSpPr>
+          <p:cNvPr id="3" name="Title 2"/>
+          <p:cNvSpPr>
+            <a:spLocks noGrp="1"/>
+          </p:cNvSpPr>
+          <p:nvPr>
+            <p:ph type="title"/>
+          </p:nvPr>
+        </p:nvSpPr>
+        <p:spPr/>
+        <p:txBody>
+          <a:bodyPr/>
+          <a:lstStyle/>
+          <a:p>
+            <a:endParaRPr lang="en-US" dirty="0"/>
+          </a:p>
+        </p:txBody>
+      </p:sp>
+      <p:sp>
+        <p:nvSpPr>
+          <p:cNvPr id="4" name="Text Placeholder 3"/>
+          <p:cNvSpPr>
+            <a:spLocks noGrp="1"/>
+          </p:cNvSpPr>
+          <p:nvPr>
+            <p:ph type="body" sz="quarter" idx="10"/>
+          </p:nvPr>
+        </p:nvSpPr>
+        <p:spPr>
+          <a:xfrm>
+            <a:off x="269239" y="1197324"/>
+            <a:ext cx="11653523" cy="1976888"/>
+          </a:xfrm>
+        </p:spPr>
+        <p:txBody>
+          <a:bodyPr/>
+          <a:lstStyle/>
+          <a:p>
+            <a:pPr marL="457200" indent="-457200">
+              <a:buFontTx/>
+              <a:buChar char="-"/>
+            </a:pPr>
+            <a:r>
+              <a:rPr lang="en-US" dirty="0"/>
+              <a:t>Distributed tracing (including across queues):</a:t>
+            </a:r>
+          </a:p>
+          <a:p>
+            <a:pPr marL="796926" lvl="1" indent="-457200">
+              <a:buFontTx/>
+              <a:buChar char="-"/>
+            </a:pPr>
+            <a:r>
+              <a:rPr lang="en-US" dirty="0">
+                <a:hlinkClick r:id="rId3"/>
+              </a:rPr>
+              <a:t>https://tinyurl.com/OTEL-RabbitMQ</a:t>
+            </a:r>
+            <a:endParaRPr lang="en-US" dirty="0"/>
+          </a:p>
+          <a:p>
+            <a:pPr marL="457200" indent="-457200">
+              <a:buFontTx/>
+              <a:buChar char="-"/>
+            </a:pPr>
+            <a:r>
+              <a:rPr lang="en-US" dirty="0"/>
+              <a:t>Pitfall:</a:t>
+            </a:r>
+          </a:p>
+          <a:p>
+            <a:pPr marL="796926" lvl="1" indent="-457200">
+              <a:buFontTx/>
+              <a:buChar char="-"/>
+            </a:pPr>
+            <a:r>
+              <a:rPr lang="en-US" dirty="0"/>
+              <a:t>Know your backend (e.g., </a:t>
+            </a:r>
+            <a:r>
+              <a:rPr lang="en-US" dirty="0" err="1"/>
+              <a:t>Graylog’s</a:t>
+            </a:r>
+            <a:r>
+              <a:rPr lang="en-US" dirty="0"/>
+              <a:t> </a:t>
+            </a:r>
+            <a:r>
+              <a:rPr lang="en-US" dirty="0" err="1"/>
+              <a:t>ElasticSearch</a:t>
+            </a:r>
+            <a:r>
+              <a:rPr lang="en-US" dirty="0"/>
+              <a:t> index typing)</a:t>
+            </a:r>
+          </a:p>
+        </p:txBody>
+      </p:sp>
+    </p:spTree>
+    <p:extLst>
+      <p:ext uri="{BB962C8B-B14F-4D97-AF65-F5344CB8AC3E}">
+        <p14:creationId xmlns:p14="http://schemas.microsoft.com/office/powerpoint/2010/main" val="3482452174"/>
+      </p:ext>
+    </p:extLst>
+  </p:cSld>
+  <p:clrMapOvr>
+    <a:masterClrMapping/>
+  </p:clrMapOvr>
+  <p:transition>
+    <p:fade/>
+  </p:transition>
 </p:sld>
 </file>
 
@@ -9811,14 +11313,7 @@
               <a:buFontTx/>
               <a:buChar char="-"/>
             </a:pPr>
-            <a:r>
-              <a:rPr lang="en-US" i="1" dirty="0"/>
-              <a:t>Timing</a:t>
-            </a:r>
-            <a:r>
-              <a:rPr lang="en-US" dirty="0"/>
-              <a:t> is a grey area; prefer traces unless you need metric.</a:t>
-            </a:r>
+            <a:endParaRPr lang="en-US" i="1" dirty="0"/>
           </a:p>
           <a:p>
             <a:pPr marL="457200" indent="-457200">
@@ -9826,12 +11321,13 @@
               <a:buChar char="-"/>
             </a:pPr>
             <a:r>
-              <a:rPr lang="en-US" dirty="0">
-                <a:hlinkClick r:id="rId3"/>
-              </a:rPr>
-              <a:t>https://tinyurl.com/AzureMonitorOTELTerminology</a:t>
-            </a:r>
-            <a:endParaRPr lang="en-US" dirty="0"/>
+              <a:rPr lang="en-US" i="1" dirty="0"/>
+              <a:t>Timing</a:t>
+            </a:r>
+            <a:r>
+              <a:rPr lang="en-US" dirty="0"/>
+              <a:t> is a grey area; prefer traces unless you need metric.</a:t>
+            </a:r>
           </a:p>
         </p:txBody>
       </p:sp>
@@ -9850,7 +11346,7 @@
           <p:nvPr/>
         </p:nvPicPr>
         <p:blipFill>
-          <a:blip r:embed="rId4">
+          <a:blip r:embed="rId3">
             <a:extLst>
               <a:ext uri="{28A0092B-C50C-407E-A947-70E740481C1C}">
                 <a14:useLocalDpi xmlns:a14="http://schemas.microsoft.com/office/drawing/2010/main" val="0"/>

--- a/Telemetry/Logging Hero.pptx
+++ b/Telemetry/Logging Hero.pptx
@@ -275,7 +275,7 @@
           <a:p>
             <a:fld id="{574E8BCA-0B4F-4373-B78E-3D2899449797}" type="datetimeFigureOut">
               <a:rPr lang="en-US" smtClean="0"/>
-              <a:t>9/11/2026</a:t>
+              <a:t>9/15/2026</a:t>
             </a:fld>
             <a:endParaRPr lang="en-US" dirty="0"/>
           </a:p>
@@ -2951,6 +2951,25 @@
               <a:rPr lang="en-US" baseline="0" dirty="0"/>
               <a:t>(undo failure code before continuing)</a:t>
             </a:r>
+          </a:p>
+          <a:p>
+            <a:pPr marL="171450" indent="-171450">
+              <a:buFont typeface="Arial" panose="020B0604020202020204" pitchFamily="34" charset="0"/>
+              <a:buChar char="•"/>
+            </a:pPr>
+            <a:r>
+              <a:rPr lang="en-US" baseline="0" dirty="0"/>
+              <a:t>(enable </a:t>
+            </a:r>
+            <a:r>
+              <a:rPr lang="en-US" baseline="0" dirty="0" err="1"/>
+              <a:t>MySqlConnector</a:t>
+            </a:r>
+            <a:r>
+              <a:rPr lang="en-US" baseline="0"/>
+              <a:t>)</a:t>
+            </a:r>
+            <a:endParaRPr lang="en-US" baseline="0" dirty="0"/>
           </a:p>
         </p:txBody>
       </p:sp>

--- a/Telemetry/Logging Hero.pptx
+++ b/Telemetry/Logging Hero.pptx
@@ -6,7 +6,7 @@
     <p:sldMasterId id="2147483718" r:id="rId2"/>
   </p:sldMasterIdLst>
   <p:notesMasterIdLst>
-    <p:notesMasterId r:id="rId38"/>
+    <p:notesMasterId r:id="rId39"/>
   </p:notesMasterIdLst>
   <p:sldIdLst>
     <p:sldId id="256" r:id="rId3"/>
@@ -41,9 +41,10 @@
     <p:sldId id="436" r:id="rId32"/>
     <p:sldId id="439" r:id="rId33"/>
     <p:sldId id="437" r:id="rId34"/>
-    <p:sldId id="438" r:id="rId35"/>
-    <p:sldId id="390" r:id="rId36"/>
-    <p:sldId id="410" r:id="rId37"/>
+    <p:sldId id="440" r:id="rId35"/>
+    <p:sldId id="438" r:id="rId36"/>
+    <p:sldId id="390" r:id="rId37"/>
+    <p:sldId id="410" r:id="rId38"/>
   </p:sldIdLst>
   <p:sldSz cx="12192000" cy="6858000"/>
   <p:notesSz cx="6858000" cy="9144000"/>
@@ -179,6 +180,7 @@
             <p14:sldId id="436"/>
             <p14:sldId id="439"/>
             <p14:sldId id="437"/>
+            <p14:sldId id="440"/>
             <p14:sldId id="438"/>
             <p14:sldId id="390"/>
             <p14:sldId id="410"/>
@@ -2213,7 +2215,7 @@
           <a:p>
             <a:fld id="{94CE3395-F8FF-4336-B2AA-E15575B990E7}" type="slidenum">
               <a:rPr lang="en-US" smtClean="0"/>
-              <a:t>33</a:t>
+              <a:t>34</a:t>
             </a:fld>
             <a:endParaRPr lang="en-US" dirty="0"/>
           </a:p>
@@ -2302,7 +2304,7 @@
           <a:p>
             <a:fld id="{94CE3395-F8FF-4336-B2AA-E15575B990E7}" type="slidenum">
               <a:rPr lang="en-US" smtClean="0"/>
-              <a:t>34</a:t>
+              <a:t>35</a:t>
             </a:fld>
             <a:endParaRPr lang="en-US" dirty="0"/>
           </a:p>
@@ -2391,7 +2393,7 @@
           <a:p>
             <a:fld id="{94CE3395-F8FF-4336-B2AA-E15575B990E7}" type="slidenum">
               <a:rPr lang="en-US" smtClean="0"/>
-              <a:t>35</a:t>
+              <a:t>36</a:t>
             </a:fld>
             <a:endParaRPr lang="en-US" dirty="0"/>
           </a:p>
@@ -2966,10 +2968,9 @@
               <a:t>MySqlConnector</a:t>
             </a:r>
             <a:r>
-              <a:rPr lang="en-US" baseline="0"/>
+              <a:rPr lang="en-US" baseline="0" dirty="0"/>
               <a:t>)</a:t>
             </a:r>
-            <a:endParaRPr lang="en-US" baseline="0" dirty="0"/>
           </a:p>
         </p:txBody>
       </p:sp>
@@ -10038,7 +10039,7 @@
         <p:spPr>
           <a:xfrm>
             <a:off x="269239" y="1197322"/>
-            <a:ext cx="11653522" cy="2225738"/>
+            <a:ext cx="11653522" cy="3022238"/>
           </a:xfrm>
         </p:spPr>
         <p:txBody>
@@ -10090,6 +10091,30 @@
             <a:r>
               <a:rPr lang="en-US" i="1" dirty="0"/>
               <a:t>fast!</a:t>
+            </a:r>
+          </a:p>
+          <a:p>
+            <a:pPr marL="796926" lvl="1" indent="-457200">
+              <a:buFontTx/>
+              <a:buChar char="-"/>
+            </a:pPr>
+            <a:r>
+              <a:rPr lang="en-US" dirty="0"/>
+              <a:t>Cardinality:</a:t>
+            </a:r>
+          </a:p>
+          <a:p>
+            <a:pPr marL="1030290" lvl="2" indent="-457200">
+              <a:buFontTx/>
+              <a:buChar char="-"/>
+            </a:pPr>
+            <a:r>
+              <a:rPr lang="en-US" dirty="0"/>
+              <a:t>Hat sales: 3 sizes, 5 colors = </a:t>
+            </a:r>
+            <a:r>
+              <a:rPr lang="en-US" b="1" dirty="0"/>
+              <a:t>15</a:t>
             </a:r>
           </a:p>
           <a:p>
@@ -10545,7 +10570,7 @@
         <p:spPr>
           <a:xfrm>
             <a:off x="269239" y="1197322"/>
-            <a:ext cx="11653522" cy="632737"/>
+            <a:ext cx="11653522" cy="3719480"/>
           </a:xfrm>
         </p:spPr>
         <p:txBody>
@@ -10554,11 +10579,46 @@
           <a:p>
             <a:r>
               <a:rPr lang="en-US" dirty="0"/>
-              <a:t>Kind: Internal</a:t>
-            </a:r>
-            <a:r>
-              <a:rPr lang="en-US"/>
-              <a:t>, Client, Server</a:t>
+              <a:t>Kind: Internal, </a:t>
+            </a:r>
+            <a:r>
+              <a:rPr lang="en-US" b="1" dirty="0"/>
+              <a:t>Client, Server</a:t>
+            </a:r>
+            <a:endParaRPr lang="en-US" dirty="0"/>
+          </a:p>
+          <a:p>
+            <a:endParaRPr lang="en-US" dirty="0"/>
+          </a:p>
+          <a:p>
+            <a:r>
+              <a:rPr lang="en-US" dirty="0"/>
+              <a:t>Mostly automatic if you’re on .NET Core (ASP.NET Core + </a:t>
+            </a:r>
+            <a:r>
+              <a:rPr lang="en-US" dirty="0" err="1"/>
+              <a:t>HttpClient</a:t>
+            </a:r>
+            <a:r>
+              <a:rPr lang="en-US" dirty="0"/>
+              <a:t>).</a:t>
+            </a:r>
+          </a:p>
+          <a:p>
+            <a:endParaRPr lang="en-US" dirty="0"/>
+          </a:p>
+          <a:p>
+            <a:r>
+              <a:rPr lang="en-US" dirty="0"/>
+              <a:t>Library support varies; </a:t>
+            </a:r>
+            <a:r>
+              <a:rPr lang="en-US" dirty="0" err="1"/>
+              <a:t>MySqlConnector</a:t>
+            </a:r>
+            <a:r>
+              <a:rPr lang="en-US" dirty="0"/>
+              <a:t> is great, SQLite needed help.</a:t>
             </a:r>
           </a:p>
         </p:txBody>
@@ -10654,6 +10714,146 @@
         <p:cNvPr id="1" name="">
           <a:extLst>
             <a:ext uri="{FF2B5EF4-FFF2-40B4-BE49-F238E27FC236}">
+              <a16:creationId xmlns:a16="http://schemas.microsoft.com/office/drawing/2014/main" id="{7D2EF492-13D8-EFEF-8BB8-C3FA3B4C7FFF}"/>
+            </a:ext>
+          </a:extLst>
+        </p:cNvPr>
+        <p:cNvGrpSpPr/>
+        <p:nvPr/>
+      </p:nvGrpSpPr>
+      <p:grpSpPr>
+        <a:xfrm>
+          <a:off x="0" y="0"/>
+          <a:ext cx="0" cy="0"/>
+          <a:chOff x="0" y="0"/>
+          <a:chExt cx="0" cy="0"/>
+        </a:xfrm>
+      </p:grpSpPr>
+      <p:sp>
+        <p:nvSpPr>
+          <p:cNvPr id="3" name="Title 2">
+            <a:extLst>
+              <a:ext uri="{FF2B5EF4-FFF2-40B4-BE49-F238E27FC236}">
+                <a16:creationId xmlns:a16="http://schemas.microsoft.com/office/drawing/2014/main" id="{4B9F91E4-E71A-499B-8DC1-3D8A08F46B7D}"/>
+              </a:ext>
+            </a:extLst>
+          </p:cNvPr>
+          <p:cNvSpPr>
+            <a:spLocks noGrp="1"/>
+          </p:cNvSpPr>
+          <p:nvPr>
+            <p:ph type="title"/>
+          </p:nvPr>
+        </p:nvSpPr>
+        <p:spPr/>
+        <p:txBody>
+          <a:bodyPr/>
+          <a:lstStyle/>
+          <a:p>
+            <a:r>
+              <a:rPr lang="en-US" dirty="0"/>
+              <a:t>Asynchronous Distributed Traces</a:t>
+            </a:r>
+          </a:p>
+        </p:txBody>
+      </p:sp>
+      <p:sp>
+        <p:nvSpPr>
+          <p:cNvPr id="4" name="Text Placeholder 3">
+            <a:extLst>
+              <a:ext uri="{FF2B5EF4-FFF2-40B4-BE49-F238E27FC236}">
+                <a16:creationId xmlns:a16="http://schemas.microsoft.com/office/drawing/2014/main" id="{389BF913-0DAA-AA9A-730D-6A8B2D046799}"/>
+              </a:ext>
+            </a:extLst>
+          </p:cNvPr>
+          <p:cNvSpPr>
+            <a:spLocks noGrp="1"/>
+          </p:cNvSpPr>
+          <p:nvPr>
+            <p:ph type="body" sz="quarter" idx="10"/>
+          </p:nvPr>
+        </p:nvSpPr>
+        <p:spPr>
+          <a:xfrm>
+            <a:off x="269239" y="1197322"/>
+            <a:ext cx="11653522" cy="4267130"/>
+          </a:xfrm>
+        </p:spPr>
+        <p:txBody>
+          <a:bodyPr/>
+          <a:lstStyle/>
+          <a:p>
+            <a:r>
+              <a:rPr lang="en-US" dirty="0"/>
+              <a:t>Kind: Internal, Client, Server, </a:t>
+            </a:r>
+            <a:r>
+              <a:rPr lang="en-US" b="1" dirty="0"/>
+              <a:t>Producer, Consumer</a:t>
+            </a:r>
+          </a:p>
+          <a:p>
+            <a:endParaRPr lang="en-US" dirty="0"/>
+          </a:p>
+          <a:p>
+            <a:r>
+              <a:rPr lang="en-US" dirty="0"/>
+              <a:t>Currently: no automatic support (although libraries like RabbitMQ .NET Client </a:t>
+            </a:r>
+            <a:r>
+              <a:rPr lang="en-US" i="1" dirty="0"/>
+              <a:t>could</a:t>
+            </a:r>
+            <a:r>
+              <a:rPr lang="en-US" dirty="0"/>
+              <a:t> make it automatic).</a:t>
+            </a:r>
+          </a:p>
+          <a:p>
+            <a:endParaRPr lang="en-US" dirty="0"/>
+          </a:p>
+          <a:p>
+            <a:r>
+              <a:rPr lang="en-US" dirty="0"/>
+              <a:t>Propagation API is odd because it can be used with: HTTP headers, queue message metadata, arbitrary dictionaries.</a:t>
+            </a:r>
+          </a:p>
+          <a:p>
+            <a:pPr marL="796926" lvl="1" indent="-457200">
+              <a:buFont typeface="Arial" panose="020B0604020202020204" pitchFamily="34" charset="0"/>
+              <a:buChar char="•"/>
+            </a:pPr>
+            <a:r>
+              <a:rPr lang="en-US" dirty="0"/>
+              <a:t>E.g., child process using serialized JSON.</a:t>
+            </a:r>
+          </a:p>
+        </p:txBody>
+      </p:sp>
+    </p:spTree>
+    <p:extLst>
+      <p:ext uri="{BB962C8B-B14F-4D97-AF65-F5344CB8AC3E}">
+        <p14:creationId xmlns:p14="http://schemas.microsoft.com/office/powerpoint/2010/main" val="878065060"/>
+      </p:ext>
+    </p:extLst>
+  </p:cSld>
+  <p:clrMapOvr>
+    <a:masterClrMapping/>
+  </p:clrMapOvr>
+  <p:transition>
+    <p:fade/>
+  </p:transition>
+</p:sld>
+</file>
+
+<file path=ppt/slides/slide34.xml><?xml version="1.0" encoding="utf-8"?>
+<p:sld xmlns:a="http://schemas.openxmlformats.org/drawingml/2006/main" xmlns:r="http://schemas.openxmlformats.org/officeDocument/2006/relationships" xmlns:p="http://schemas.openxmlformats.org/presentationml/2006/main">
+  <p:cSld>
+    <p:spTree>
+      <p:nvGrpSpPr>
+        <p:cNvPr id="1" name="">
+          <a:extLst>
+            <a:ext uri="{FF2B5EF4-FFF2-40B4-BE49-F238E27FC236}">
               <a16:creationId xmlns:a16="http://schemas.microsoft.com/office/drawing/2014/main" id="{0A1BF229-E76D-15B8-6E38-E38D1B1771C4}"/>
             </a:ext>
           </a:extLst>
@@ -10692,7 +10892,7 @@
           <a:p>
             <a:r>
               <a:rPr lang="en-US" dirty="0"/>
-              <a:t>Demo 6: Custom Traces</a:t>
+              <a:t>Demo 8: Asynchronous Distributed Traces</a:t>
             </a:r>
           </a:p>
         </p:txBody>
@@ -10713,7 +10913,7 @@
 </p:sld>
 </file>
 
-<file path=ppt/slides/slide34.xml><?xml version="1.0" encoding="utf-8"?>
+<file path=ppt/slides/slide35.xml><?xml version="1.0" encoding="utf-8"?>
 <p:sld xmlns:a="http://schemas.openxmlformats.org/drawingml/2006/main" xmlns:r="http://schemas.openxmlformats.org/officeDocument/2006/relationships" xmlns:p="http://schemas.openxmlformats.org/presentationml/2006/main">
   <p:cSld>
     <p:spTree>
@@ -10912,7 +11112,7 @@
 </p:sld>
 </file>
 
-<file path=ppt/slides/slide35.xml><?xml version="1.0" encoding="utf-8"?>
+<file path=ppt/slides/slide36.xml><?xml version="1.0" encoding="utf-8"?>
 <p:sld xmlns:a="http://schemas.openxmlformats.org/drawingml/2006/main" xmlns:r="http://schemas.openxmlformats.org/officeDocument/2006/relationships" xmlns:p="http://schemas.openxmlformats.org/presentationml/2006/main">
   <p:cSld>
     <p:spTree>

--- a/Telemetry/Logging Hero.pptx
+++ b/Telemetry/Logging Hero.pptx
@@ -6,7 +6,7 @@
     <p:sldMasterId id="2147483718" r:id="rId2"/>
   </p:sldMasterIdLst>
   <p:notesMasterIdLst>
-    <p:notesMasterId r:id="rId39"/>
+    <p:notesMasterId r:id="rId40"/>
   </p:notesMasterIdLst>
   <p:sldIdLst>
     <p:sldId id="256" r:id="rId3"/>
@@ -43,8 +43,9 @@
     <p:sldId id="437" r:id="rId34"/>
     <p:sldId id="440" r:id="rId35"/>
     <p:sldId id="438" r:id="rId36"/>
-    <p:sldId id="390" r:id="rId37"/>
-    <p:sldId id="410" r:id="rId38"/>
+    <p:sldId id="441" r:id="rId37"/>
+    <p:sldId id="390" r:id="rId38"/>
+    <p:sldId id="410" r:id="rId39"/>
   </p:sldIdLst>
   <p:sldSz cx="12192000" cy="6858000"/>
   <p:notesSz cx="6858000" cy="9144000"/>
@@ -182,6 +183,7 @@
             <p14:sldId id="437"/>
             <p14:sldId id="440"/>
             <p14:sldId id="438"/>
+            <p14:sldId id="441"/>
             <p14:sldId id="390"/>
             <p14:sldId id="410"/>
           </p14:sldIdLst>
@@ -277,7 +279,7 @@
           <a:p>
             <a:fld id="{574E8BCA-0B4F-4373-B78E-3D2899449797}" type="datetimeFigureOut">
               <a:rPr lang="en-US" smtClean="0"/>
-              <a:t>9/15/2026</a:t>
+              <a:t>9/16/2026</a:t>
             </a:fld>
             <a:endParaRPr lang="en-US" dirty="0"/>
           </a:p>
@@ -2261,12 +2263,7 @@
             <p:ph type="sldImg"/>
           </p:nvPr>
         </p:nvSpPr>
-        <p:spPr>
-          <a:xfrm>
-            <a:off x="685800" y="1143000"/>
-            <a:ext cx="5486400" cy="3086100"/>
-          </a:xfrm>
-        </p:spPr>
+        <p:spPr/>
       </p:sp>
       <p:sp>
         <p:nvSpPr>
@@ -2283,7 +2280,16 @@
           <a:bodyPr/>
           <a:lstStyle/>
           <a:p>
-            <a:endParaRPr lang="en-US" baseline="0" dirty="0"/>
+            <a:r>
+              <a:rPr lang="en-US" dirty="0"/>
+              <a:t>As you start adding Telemetry, you’ll end up with way too much.</a:t>
+            </a:r>
+          </a:p>
+          <a:p>
+            <a:r>
+              <a:rPr lang="en-US" dirty="0"/>
+              <a:t>Pay attention to signal and noise, and if anyone is actually using the telemetry you publish.</a:t>
+            </a:r>
           </a:p>
         </p:txBody>
       </p:sp>
@@ -2294,7 +2300,7 @@
             <a:spLocks noGrp="1"/>
           </p:cNvSpPr>
           <p:nvPr>
-            <p:ph type="sldNum" sz="quarter" idx="10"/>
+            <p:ph type="sldNum" sz="quarter" idx="5"/>
           </p:nvPr>
         </p:nvSpPr>
         <p:spPr/>
@@ -2313,7 +2319,7 @@
     </p:spTree>
     <p:extLst>
       <p:ext uri="{BB962C8B-B14F-4D97-AF65-F5344CB8AC3E}">
-        <p14:creationId xmlns:p14="http://schemas.microsoft.com/office/powerpoint/2010/main" val="2659012186"/>
+        <p14:creationId xmlns:p14="http://schemas.microsoft.com/office/powerpoint/2010/main" val="590801011"/>
       </p:ext>
     </p:extLst>
   </p:cSld>
@@ -2372,7 +2378,7 @@
           <a:bodyPr/>
           <a:lstStyle/>
           <a:p>
-            <a:endParaRPr lang="en-US" dirty="0"/>
+            <a:endParaRPr lang="en-US" baseline="0" dirty="0"/>
           </a:p>
         </p:txBody>
       </p:sp>
@@ -2394,6 +2400,95 @@
             <a:fld id="{94CE3395-F8FF-4336-B2AA-E15575B990E7}" type="slidenum">
               <a:rPr lang="en-US" smtClean="0"/>
               <a:t>36</a:t>
+            </a:fld>
+            <a:endParaRPr lang="en-US" dirty="0"/>
+          </a:p>
+        </p:txBody>
+      </p:sp>
+    </p:spTree>
+    <p:extLst>
+      <p:ext uri="{BB962C8B-B14F-4D97-AF65-F5344CB8AC3E}">
+        <p14:creationId xmlns:p14="http://schemas.microsoft.com/office/powerpoint/2010/main" val="2659012186"/>
+      </p:ext>
+    </p:extLst>
+  </p:cSld>
+  <p:clrMapOvr>
+    <a:masterClrMapping/>
+  </p:clrMapOvr>
+</p:notes>
+</file>
+
+<file path=ppt/notesSlides/notesSlide27.xml><?xml version="1.0" encoding="utf-8"?>
+<p:notes xmlns:a="http://schemas.openxmlformats.org/drawingml/2006/main" xmlns:r="http://schemas.openxmlformats.org/officeDocument/2006/relationships" xmlns:p="http://schemas.openxmlformats.org/presentationml/2006/main">
+  <p:cSld>
+    <p:spTree>
+      <p:nvGrpSpPr>
+        <p:cNvPr id="1" name=""/>
+        <p:cNvGrpSpPr/>
+        <p:nvPr/>
+      </p:nvGrpSpPr>
+      <p:grpSpPr>
+        <a:xfrm>
+          <a:off x="0" y="0"/>
+          <a:ext cx="0" cy="0"/>
+          <a:chOff x="0" y="0"/>
+          <a:chExt cx="0" cy="0"/>
+        </a:xfrm>
+      </p:grpSpPr>
+      <p:sp>
+        <p:nvSpPr>
+          <p:cNvPr id="2" name="Slide Image Placeholder 1"/>
+          <p:cNvSpPr>
+            <a:spLocks noGrp="1" noRot="1" noChangeAspect="1"/>
+          </p:cNvSpPr>
+          <p:nvPr>
+            <p:ph type="sldImg"/>
+          </p:nvPr>
+        </p:nvSpPr>
+        <p:spPr>
+          <a:xfrm>
+            <a:off x="685800" y="1143000"/>
+            <a:ext cx="5486400" cy="3086100"/>
+          </a:xfrm>
+        </p:spPr>
+      </p:sp>
+      <p:sp>
+        <p:nvSpPr>
+          <p:cNvPr id="3" name="Notes Placeholder 2"/>
+          <p:cNvSpPr>
+            <a:spLocks noGrp="1"/>
+          </p:cNvSpPr>
+          <p:nvPr>
+            <p:ph type="body" idx="1"/>
+          </p:nvPr>
+        </p:nvSpPr>
+        <p:spPr/>
+        <p:txBody>
+          <a:bodyPr/>
+          <a:lstStyle/>
+          <a:p>
+            <a:endParaRPr lang="en-US" dirty="0"/>
+          </a:p>
+        </p:txBody>
+      </p:sp>
+      <p:sp>
+        <p:nvSpPr>
+          <p:cNvPr id="4" name="Slide Number Placeholder 3"/>
+          <p:cNvSpPr>
+            <a:spLocks noGrp="1"/>
+          </p:cNvSpPr>
+          <p:nvPr>
+            <p:ph type="sldNum" sz="quarter" idx="10"/>
+          </p:nvPr>
+        </p:nvSpPr>
+        <p:spPr/>
+        <p:txBody>
+          <a:bodyPr/>
+          <a:lstStyle/>
+          <a:p>
+            <a:fld id="{94CE3395-F8FF-4336-B2AA-E15575B990E7}" type="slidenum">
+              <a:rPr lang="en-US" smtClean="0"/>
+              <a:t>37</a:t>
             </a:fld>
             <a:endParaRPr lang="en-US" dirty="0"/>
           </a:p>
@@ -2549,7 +2644,20 @@
               <a:buFont typeface="Arial" panose="020B0604020202020204" pitchFamily="34" charset="0"/>
               <a:buChar char="•"/>
             </a:pPr>
-            <a:endParaRPr lang="en-US" baseline="0" dirty="0"/>
+            <a:r>
+              <a:rPr lang="en-US" baseline="0" dirty="0"/>
+              <a:t>Anyone used telemetry already?</a:t>
+            </a:r>
+          </a:p>
+          <a:p>
+            <a:pPr marL="171450" indent="-171450">
+              <a:buFont typeface="Arial" panose="020B0604020202020204" pitchFamily="34" charset="0"/>
+              <a:buChar char="•"/>
+            </a:pPr>
+            <a:r>
+              <a:rPr lang="en-US" baseline="0" dirty="0"/>
+              <a:t>Logs, traces, metrics?</a:t>
+            </a:r>
           </a:p>
         </p:txBody>
       </p:sp>
@@ -10350,6 +10458,36 @@
           </a:p>
         </p:txBody>
       </p:sp>
+      <p:pic>
+        <p:nvPicPr>
+          <p:cNvPr id="2" name="Picture 1">
+            <a:extLst>
+              <a:ext uri="{FF2B5EF4-FFF2-40B4-BE49-F238E27FC236}">
+                <a16:creationId xmlns:a16="http://schemas.microsoft.com/office/drawing/2014/main" id="{738AA788-40D3-6B3B-59F9-79C8BEC928AD}"/>
+              </a:ext>
+            </a:extLst>
+          </p:cNvPr>
+          <p:cNvPicPr>
+            <a:picLocks noChangeAspect="1"/>
+          </p:cNvPicPr>
+          <p:nvPr/>
+        </p:nvPicPr>
+        <p:blipFill>
+          <a:blip r:embed="rId2"/>
+          <a:stretch>
+            <a:fillRect/>
+          </a:stretch>
+        </p:blipFill>
+        <p:spPr>
+          <a:xfrm>
+            <a:off x="4199915" y="3265714"/>
+            <a:ext cx="3792169" cy="2838450"/>
+          </a:xfrm>
+          <a:prstGeom prst="rect">
+            <a:avLst/>
+          </a:prstGeom>
+        </p:spPr>
+      </p:pic>
     </p:spTree>
     <p:extLst>
       <p:ext uri="{BB962C8B-B14F-4D97-AF65-F5344CB8AC3E}">
@@ -10776,7 +10914,7 @@
         <p:spPr>
           <a:xfrm>
             <a:off x="269239" y="1197322"/>
-            <a:ext cx="11653522" cy="4267130"/>
+            <a:ext cx="11653522" cy="4515980"/>
           </a:xfrm>
         </p:spPr>
         <p:txBody>
@@ -10826,6 +10964,20 @@
             <a:r>
               <a:rPr lang="en-US" dirty="0"/>
               <a:t>E.g., child process using serialized JSON.</a:t>
+            </a:r>
+          </a:p>
+          <a:p>
+            <a:pPr marL="796926" lvl="1" indent="-457200">
+              <a:buFont typeface="Arial" panose="020B0604020202020204" pitchFamily="34" charset="0"/>
+              <a:buChar char="•"/>
+            </a:pPr>
+            <a:r>
+              <a:rPr lang="en-US" dirty="0" err="1"/>
+              <a:t>HttpClient</a:t>
+            </a:r>
+            <a:r>
+              <a:rPr lang="en-US" dirty="0"/>
+              <a:t> &amp; ASP.NET Core use propagation for their Client/Server traces.</a:t>
             </a:r>
           </a:p>
         </p:txBody>
@@ -10897,6 +11049,36 @@
           </a:p>
         </p:txBody>
       </p:sp>
+      <p:pic>
+        <p:nvPicPr>
+          <p:cNvPr id="3" name="Picture 2">
+            <a:extLst>
+              <a:ext uri="{FF2B5EF4-FFF2-40B4-BE49-F238E27FC236}">
+                <a16:creationId xmlns:a16="http://schemas.microsoft.com/office/drawing/2014/main" id="{0FFE20B9-88C1-DF28-CB83-C7FE6B4E0CC6}"/>
+              </a:ext>
+            </a:extLst>
+          </p:cNvPr>
+          <p:cNvPicPr>
+            <a:picLocks noChangeAspect="1"/>
+          </p:cNvPicPr>
+          <p:nvPr/>
+        </p:nvPicPr>
+        <p:blipFill>
+          <a:blip r:embed="rId3"/>
+          <a:stretch>
+            <a:fillRect/>
+          </a:stretch>
+        </p:blipFill>
+        <p:spPr>
+          <a:xfrm>
+            <a:off x="8613924" y="3294603"/>
+            <a:ext cx="3479660" cy="2277130"/>
+          </a:xfrm>
+          <a:prstGeom prst="rect">
+            <a:avLst/>
+          </a:prstGeom>
+        </p:spPr>
+      </p:pic>
     </p:spTree>
     <p:extLst>
       <p:ext uri="{BB962C8B-B14F-4D97-AF65-F5344CB8AC3E}">
@@ -10932,7 +11114,13 @@
       </p:grpSpPr>
       <p:sp>
         <p:nvSpPr>
-          <p:cNvPr id="4" name="Title 3"/>
+          <p:cNvPr id="3" name="Title 2">
+            <a:extLst>
+              <a:ext uri="{FF2B5EF4-FFF2-40B4-BE49-F238E27FC236}">
+                <a16:creationId xmlns:a16="http://schemas.microsoft.com/office/drawing/2014/main" id="{62F8367F-AB1D-375E-EDD7-94DF4F9EA4AB}"/>
+              </a:ext>
+            </a:extLst>
+          </p:cNvPr>
           <p:cNvSpPr>
             <a:spLocks noGrp="1"/>
           </p:cNvSpPr>
@@ -10947,21 +11135,255 @@
           <a:p>
             <a:r>
               <a:rPr lang="en-US" dirty="0"/>
-              <a:t>Q&amp;A</a:t>
-            </a:r>
+              <a:t>Final Notes: Reducing Noise</a:t>
+            </a:r>
+          </a:p>
+        </p:txBody>
+      </p:sp>
+      <p:sp>
+        <p:nvSpPr>
+          <p:cNvPr id="4" name="Text Placeholder 3">
+            <a:extLst>
+              <a:ext uri="{FF2B5EF4-FFF2-40B4-BE49-F238E27FC236}">
+                <a16:creationId xmlns:a16="http://schemas.microsoft.com/office/drawing/2014/main" id="{3048E147-2E0E-F80A-00E7-95B2EB7A4293}"/>
+              </a:ext>
+            </a:extLst>
+          </p:cNvPr>
+          <p:cNvSpPr>
+            <a:spLocks noGrp="1"/>
+          </p:cNvSpPr>
+          <p:nvPr>
+            <p:ph type="body" sz="quarter" idx="10"/>
+          </p:nvPr>
+        </p:nvSpPr>
+        <p:spPr>
+          <a:xfrm>
+            <a:off x="269239" y="1197322"/>
+            <a:ext cx="11653522" cy="3918637"/>
+          </a:xfrm>
+        </p:spPr>
+        <p:txBody>
+          <a:bodyPr/>
+          <a:lstStyle/>
+          <a:p>
+            <a:pPr marL="457200" indent="-457200">
+              <a:buFontTx/>
+              <a:buChar char="-"/>
+            </a:pPr>
+            <a:r>
+              <a:rPr lang="en-US" dirty="0"/>
+              <a:t>Logging: </a:t>
+            </a:r>
+            <a:r>
+              <a:rPr lang="en-US" dirty="0">
+                <a:hlinkClick r:id="rId3"/>
+              </a:rPr>
+              <a:t>filters</a:t>
+            </a:r>
+            <a:endParaRPr lang="en-US" dirty="0"/>
+          </a:p>
+          <a:p>
+            <a:pPr marL="457200" indent="-457200">
+              <a:buFontTx/>
+              <a:buChar char="-"/>
+            </a:pPr>
+            <a:r>
+              <a:rPr lang="en-US" dirty="0"/>
+              <a:t>Traces: </a:t>
+            </a:r>
+            <a:r>
+              <a:rPr lang="en-US" dirty="0">
+                <a:hlinkClick r:id="rId4"/>
+              </a:rPr>
+              <a:t>sampling</a:t>
+            </a:r>
+            <a:endParaRPr lang="en-US" dirty="0"/>
+          </a:p>
+          <a:p>
+            <a:pPr marL="457200" indent="-457200">
+              <a:buFontTx/>
+              <a:buChar char="-"/>
+            </a:pPr>
+            <a:r>
+              <a:rPr lang="en-US" dirty="0"/>
+              <a:t>Metrics: only turn on what you need (e.g., alerts)</a:t>
+            </a:r>
+          </a:p>
+          <a:p>
+            <a:pPr marL="457200" indent="-457200">
+              <a:buFontTx/>
+              <a:buChar char="-"/>
+            </a:pPr>
+            <a:endParaRPr lang="en-US" dirty="0"/>
+          </a:p>
+          <a:p>
+            <a:pPr marL="457200" indent="-457200">
+              <a:buFontTx/>
+              <a:buChar char="-"/>
+            </a:pPr>
+            <a:r>
+              <a:rPr lang="en-US" dirty="0"/>
+              <a:t>Consider running OTEL Collector; it can filter and transform!</a:t>
+            </a:r>
+          </a:p>
+          <a:p>
+            <a:pPr marL="514350" indent="-514350">
+              <a:buFont typeface="Arial" panose="020B0604020202020204" pitchFamily="34" charset="0"/>
+              <a:buChar char="•"/>
+            </a:pPr>
+            <a:endParaRPr lang="en-US" dirty="0"/>
+          </a:p>
+          <a:p>
+            <a:pPr marL="514350" indent="-514350">
+              <a:buFont typeface="Arial" panose="020B0604020202020204" pitchFamily="34" charset="0"/>
+              <a:buChar char="•"/>
+            </a:pPr>
+            <a:endParaRPr lang="en-US" dirty="0"/>
           </a:p>
         </p:txBody>
       </p:sp>
       <p:pic>
         <p:nvPicPr>
-          <p:cNvPr id="5" name="Picture 4"/>
+          <p:cNvPr id="5" name="Picture 4" descr="Drinking from the firehose Meme Generator - Imgflip">
+            <a:extLst>
+              <a:ext uri="{FF2B5EF4-FFF2-40B4-BE49-F238E27FC236}">
+                <a16:creationId xmlns:a16="http://schemas.microsoft.com/office/drawing/2014/main" id="{7976156F-F090-895E-FEEF-96C8E832AA4B}"/>
+              </a:ext>
+            </a:extLst>
+          </p:cNvPr>
           <p:cNvPicPr>
             <a:picLocks noChangeAspect="1"/>
           </p:cNvPicPr>
           <p:nvPr/>
         </p:nvPicPr>
         <p:blipFill>
-          <a:blip r:embed="rId3" cstate="print">
+          <a:blip r:embed="rId5"/>
+          <a:stretch>
+            <a:fillRect/>
+          </a:stretch>
+        </p:blipFill>
+        <p:spPr>
+          <a:xfrm>
+            <a:off x="4548187" y="4184303"/>
+            <a:ext cx="3095625" cy="1476375"/>
+          </a:xfrm>
+          <a:prstGeom prst="rect">
+            <a:avLst/>
+          </a:prstGeom>
+        </p:spPr>
+      </p:pic>
+    </p:spTree>
+    <p:extLst>
+      <p:ext uri="{BB962C8B-B14F-4D97-AF65-F5344CB8AC3E}">
+        <p14:creationId xmlns:p14="http://schemas.microsoft.com/office/powerpoint/2010/main" val="609045950"/>
+      </p:ext>
+    </p:extLst>
+  </p:cSld>
+  <p:clrMapOvr>
+    <a:masterClrMapping/>
+  </p:clrMapOvr>
+  <p:transition>
+    <p:fade/>
+  </p:transition>
+</p:sld>
+</file>
+
+<file path=ppt/slides/slide36.xml><?xml version="1.0" encoding="utf-8"?>
+<p:sld xmlns:a="http://schemas.openxmlformats.org/drawingml/2006/main" xmlns:r="http://schemas.openxmlformats.org/officeDocument/2006/relationships" xmlns:p="http://schemas.openxmlformats.org/presentationml/2006/main">
+  <p:cSld>
+    <p:spTree>
+      <p:nvGrpSpPr>
+        <p:cNvPr id="1" name=""/>
+        <p:cNvGrpSpPr/>
+        <p:nvPr/>
+      </p:nvGrpSpPr>
+      <p:grpSpPr>
+        <a:xfrm>
+          <a:off x="0" y="0"/>
+          <a:ext cx="0" cy="0"/>
+          <a:chOff x="0" y="0"/>
+          <a:chExt cx="0" cy="0"/>
+        </a:xfrm>
+      </p:grpSpPr>
+      <p:sp>
+        <p:nvSpPr>
+          <p:cNvPr id="4" name="Title 3"/>
+          <p:cNvSpPr>
+            <a:spLocks noGrp="1"/>
+          </p:cNvSpPr>
+          <p:nvPr>
+            <p:ph type="title"/>
+          </p:nvPr>
+        </p:nvSpPr>
+        <p:spPr/>
+        <p:txBody>
+          <a:bodyPr/>
+          <a:lstStyle/>
+          <a:p>
+            <a:r>
+              <a:rPr lang="en-US" dirty="0"/>
+              <a:t>Q&amp;A</a:t>
+            </a:r>
+          </a:p>
+        </p:txBody>
+      </p:sp>
+      <p:sp>
+        <p:nvSpPr>
+          <p:cNvPr id="6" name="TextBox 5"/>
+          <p:cNvSpPr txBox="1"/>
+          <p:nvPr/>
+        </p:nvSpPr>
+        <p:spPr>
+          <a:xfrm>
+            <a:off x="1725930" y="3296644"/>
+            <a:ext cx="2912785" cy="470898"/>
+          </a:xfrm>
+          <a:prstGeom prst="rect">
+            <a:avLst/>
+          </a:prstGeom>
+          <a:noFill/>
+        </p:spPr>
+        <p:txBody>
+          <a:bodyPr wrap="none" lIns="137160" tIns="109728" rIns="137160" bIns="109728" rtlCol="0">
+            <a:spAutoFit/>
+          </a:bodyPr>
+          <a:lstStyle/>
+          <a:p>
+            <a:pPr>
+              <a:lnSpc>
+                <a:spcPct val="90000"/>
+              </a:lnSpc>
+              <a:spcAft>
+                <a:spcPts val="450"/>
+              </a:spcAft>
+            </a:pPr>
+            <a:r>
+              <a:rPr lang="en-US" i="1" dirty="0">
+                <a:solidFill>
+                  <a:schemeClr val="bg1"/>
+                </a:solidFill>
+              </a:rPr>
+              <a:t>Go forth and be awesome!</a:t>
+            </a:r>
+          </a:p>
+        </p:txBody>
+      </p:sp>
+      <p:pic>
+        <p:nvPicPr>
+          <p:cNvPr id="3" name="Picture 2">
+            <a:extLst>
+              <a:ext uri="{FF2B5EF4-FFF2-40B4-BE49-F238E27FC236}">
+                <a16:creationId xmlns:a16="http://schemas.microsoft.com/office/drawing/2014/main" id="{5ADAA7EF-C868-0999-EDF2-553DC8E71C32}"/>
+              </a:ext>
+            </a:extLst>
+          </p:cNvPr>
+          <p:cNvPicPr>
+            <a:picLocks noChangeAspect="1"/>
+          </p:cNvPicPr>
+          <p:nvPr/>
+        </p:nvPicPr>
+        <p:blipFill>
+          <a:blip r:embed="rId3">
             <a:extLst>
               <a:ext uri="{28A0092B-C50C-407E-A947-70E740481C1C}">
                 <a14:useLocalDpi xmlns:a14="http://schemas.microsoft.com/office/drawing/2010/main" val="0"/>
@@ -10974,128 +11396,14 @@
         </p:blipFill>
         <p:spPr>
           <a:xfrm>
-            <a:off x="6724529" y="1103070"/>
-            <a:ext cx="3129100" cy="3981780"/>
+            <a:off x="7400401" y="1708848"/>
+            <a:ext cx="2857500" cy="2857500"/>
           </a:xfrm>
           <a:prstGeom prst="rect">
             <a:avLst/>
           </a:prstGeom>
         </p:spPr>
       </p:pic>
-      <p:sp>
-        <p:nvSpPr>
-          <p:cNvPr id="6" name="TextBox 5"/>
-          <p:cNvSpPr txBox="1"/>
-          <p:nvPr/>
-        </p:nvSpPr>
-        <p:spPr>
-          <a:xfrm>
-            <a:off x="1725930" y="3296644"/>
-            <a:ext cx="2912785" cy="470898"/>
-          </a:xfrm>
-          <a:prstGeom prst="rect">
-            <a:avLst/>
-          </a:prstGeom>
-          <a:noFill/>
-        </p:spPr>
-        <p:txBody>
-          <a:bodyPr wrap="none" lIns="137160" tIns="109728" rIns="137160" bIns="109728" rtlCol="0">
-            <a:spAutoFit/>
-          </a:bodyPr>
-          <a:lstStyle/>
-          <a:p>
-            <a:pPr>
-              <a:lnSpc>
-                <a:spcPct val="90000"/>
-              </a:lnSpc>
-              <a:spcAft>
-                <a:spcPts val="450"/>
-              </a:spcAft>
-            </a:pPr>
-            <a:r>
-              <a:rPr lang="en-US" i="1" dirty="0">
-                <a:solidFill>
-                  <a:schemeClr val="bg1"/>
-                </a:solidFill>
-              </a:rPr>
-              <a:t>Go forth and be awesome!</a:t>
-            </a:r>
-          </a:p>
-        </p:txBody>
-      </p:sp>
-      <p:sp>
-        <p:nvSpPr>
-          <p:cNvPr id="7" name="TextBox 6"/>
-          <p:cNvSpPr txBox="1"/>
-          <p:nvPr/>
-        </p:nvSpPr>
-        <p:spPr>
-          <a:xfrm>
-            <a:off x="6795786" y="5084852"/>
-            <a:ext cx="3003707" cy="346249"/>
-          </a:xfrm>
-          <a:prstGeom prst="rect">
-            <a:avLst/>
-          </a:prstGeom>
-          <a:noFill/>
-        </p:spPr>
-        <p:txBody>
-          <a:bodyPr wrap="none" lIns="137160" tIns="109728" rIns="137160" bIns="109728" rtlCol="0">
-            <a:spAutoFit/>
-          </a:bodyPr>
-          <a:lstStyle/>
-          <a:p>
-            <a:pPr>
-              <a:lnSpc>
-                <a:spcPct val="90000"/>
-              </a:lnSpc>
-              <a:spcAft>
-                <a:spcPts val="450"/>
-              </a:spcAft>
-            </a:pPr>
-            <a:r>
-              <a:rPr lang="en-US" sz="900" dirty="0">
-                <a:solidFill>
-                  <a:schemeClr val="bg1"/>
-                </a:solidFill>
-              </a:rPr>
-              <a:t>Image from </a:t>
-            </a:r>
-            <a:r>
-              <a:rPr lang="en-US" sz="900" dirty="0" err="1">
-                <a:solidFill>
-                  <a:schemeClr val="bg1"/>
-                </a:solidFill>
-              </a:rPr>
-              <a:t>Etsy</a:t>
-            </a:r>
-            <a:r>
-              <a:rPr lang="en-US" sz="900" dirty="0">
-                <a:solidFill>
-                  <a:schemeClr val="bg1"/>
-                </a:solidFill>
-              </a:rPr>
-              <a:t> user </a:t>
-            </a:r>
-            <a:r>
-              <a:rPr lang="en-US" sz="900" dirty="0" err="1">
-                <a:solidFill>
-                  <a:schemeClr val="bg1"/>
-                </a:solidFill>
-              </a:rPr>
-              <a:t>Rosewine</a:t>
-            </a:r>
-            <a:r>
-              <a:rPr lang="en-US" sz="900" dirty="0">
-                <a:solidFill>
-                  <a:schemeClr val="bg1"/>
-                </a:solidFill>
-              </a:rPr>
-              <a:t>; used with permission</a:t>
-            </a:r>
-          </a:p>
-        </p:txBody>
-      </p:sp>
     </p:spTree>
     <p:extLst>
       <p:ext uri="{BB962C8B-B14F-4D97-AF65-F5344CB8AC3E}">
@@ -11112,7 +11420,7 @@
 </p:sld>
 </file>
 
-<file path=ppt/slides/slide36.xml><?xml version="1.0" encoding="utf-8"?>
+<file path=ppt/slides/slide37.xml><?xml version="1.0" encoding="utf-8"?>
 <p:sld xmlns:a="http://schemas.openxmlformats.org/drawingml/2006/main" xmlns:r="http://schemas.openxmlformats.org/officeDocument/2006/relationships" xmlns:p="http://schemas.openxmlformats.org/presentationml/2006/main">
   <p:cSld>
     <p:spTree>
@@ -11487,7 +11795,7 @@
             </a:pPr>
             <a:r>
               <a:rPr lang="en-US" dirty="0"/>
-              <a:t>Metrics</a:t>
+              <a:t>Traces</a:t>
             </a:r>
           </a:p>
           <a:p>
@@ -11497,7 +11805,7 @@
             </a:pPr>
             <a:r>
               <a:rPr lang="en-US" dirty="0"/>
-              <a:t>Measurements. Think Prometheus/Grafana dashboards.</a:t>
+              <a:t>Spans. Think waterfall diagrams or Start/Stop events.</a:t>
             </a:r>
           </a:p>
           <a:p>
@@ -11507,7 +11815,7 @@
             </a:pPr>
             <a:r>
               <a:rPr lang="en-US" dirty="0"/>
-              <a:t>Traces</a:t>
+              <a:t>Metrics</a:t>
             </a:r>
           </a:p>
           <a:p>
@@ -11517,7 +11825,7 @@
             </a:pPr>
             <a:r>
               <a:rPr lang="en-US" dirty="0"/>
-              <a:t>Spans. Think waterfall diagrams or Start/Stop events.</a:t>
+              <a:t>Measurements. Think Prometheus/Grafana dashboards.</a:t>
             </a:r>
           </a:p>
           <a:p>

--- a/Telemetry/Logging Hero.pptx
+++ b/Telemetry/Logging Hero.pptx
@@ -279,7 +279,7 @@
           <a:p>
             <a:fld id="{574E8BCA-0B4F-4373-B78E-3D2899449797}" type="datetimeFigureOut">
               <a:rPr lang="en-US" smtClean="0"/>
-              <a:t>9/16/2026</a:t>
+              <a:t>10/23/2026</a:t>
             </a:fld>
             <a:endParaRPr lang="en-US" dirty="0"/>
           </a:p>
@@ -6983,7 +6983,7 @@
         </p:nvSpPr>
         <p:spPr bwMode="auto">
           <a:xfrm>
-            <a:off x="6482630" y="5062548"/>
+            <a:off x="6482630" y="5381598"/>
             <a:ext cx="2331217" cy="395426"/>
           </a:xfrm>
           <a:prstGeom prst="rect">
@@ -7317,7 +7317,7 @@
         <p:spPr>
           <a:xfrm>
             <a:off x="5395573" y="2777885"/>
-            <a:ext cx="1087057" cy="2482376"/>
+            <a:ext cx="1087057" cy="2801426"/>
           </a:xfrm>
           <a:prstGeom prst="straightConnector1">
             <a:avLst/>
@@ -7362,6 +7362,226 @@
           <a:xfrm>
             <a:off x="8813849" y="3894266"/>
             <a:ext cx="594758" cy="1"/>
+          </a:xfrm>
+          <a:prstGeom prst="straightConnector1">
+            <a:avLst/>
+          </a:prstGeom>
+          <a:ln>
+            <a:headEnd type="none"/>
+            <a:tailEnd type="triangle"/>
+          </a:ln>
+        </p:spPr>
+        <p:style>
+          <a:lnRef idx="1">
+            <a:schemeClr val="dk1"/>
+          </a:lnRef>
+          <a:fillRef idx="0">
+            <a:schemeClr val="dk1"/>
+          </a:fillRef>
+          <a:effectRef idx="0">
+            <a:schemeClr val="dk1"/>
+          </a:effectRef>
+          <a:fontRef idx="minor">
+            <a:schemeClr val="tx1"/>
+          </a:fontRef>
+        </p:style>
+      </p:cxnSp>
+      <p:sp>
+        <p:nvSpPr>
+          <p:cNvPr id="10" name="Rectangle 9">
+            <a:extLst>
+              <a:ext uri="{FF2B5EF4-FFF2-40B4-BE49-F238E27FC236}">
+                <a16:creationId xmlns:a16="http://schemas.microsoft.com/office/drawing/2014/main" id="{D52F6963-DD6C-E386-1403-892B183A1647}"/>
+              </a:ext>
+            </a:extLst>
+          </p:cNvPr>
+          <p:cNvSpPr/>
+          <p:nvPr/>
+        </p:nvSpPr>
+        <p:spPr bwMode="auto">
+          <a:xfrm>
+            <a:off x="6482629" y="4917478"/>
+            <a:ext cx="2331217" cy="395426"/>
+          </a:xfrm>
+          <a:prstGeom prst="rect">
+            <a:avLst/>
+          </a:prstGeom>
+          <a:ln>
+            <a:headEnd type="none" w="med" len="med"/>
+            <a:tailEnd type="none" w="med" len="med"/>
+          </a:ln>
+        </p:spPr>
+        <p:style>
+          <a:lnRef idx="2">
+            <a:schemeClr val="accent6"/>
+          </a:lnRef>
+          <a:fillRef idx="1">
+            <a:schemeClr val="lt1"/>
+          </a:fillRef>
+          <a:effectRef idx="0">
+            <a:schemeClr val="accent6"/>
+          </a:effectRef>
+          <a:fontRef idx="minor">
+            <a:schemeClr val="dk1"/>
+          </a:fontRef>
+        </p:style>
+        <p:txBody>
+          <a:bodyPr vert="horz" wrap="square" lIns="0" tIns="46637" rIns="0" bIns="46637" numCol="1" rtlCol="0" anchor="ctr" anchorCtr="0" compatLnSpc="1">
+            <a:prstTxWarp prst="textNoShape">
+              <a:avLst/>
+            </a:prstTxWarp>
+          </a:bodyPr>
+          <a:lstStyle/>
+          <a:p>
+            <a:pPr algn="ctr" defTabSz="932472" fontAlgn="base">
+              <a:spcBef>
+                <a:spcPct val="0"/>
+              </a:spcBef>
+              <a:spcAft>
+                <a:spcPct val="0"/>
+              </a:spcAft>
+            </a:pPr>
+            <a:r>
+              <a:rPr lang="en-US" sz="2000" dirty="0">
+                <a:solidFill>
+                  <a:schemeClr val="bg1"/>
+                </a:solidFill>
+              </a:rPr>
+              <a:t>Azure</a:t>
+            </a:r>
+          </a:p>
+        </p:txBody>
+      </p:sp>
+      <p:sp>
+        <p:nvSpPr>
+          <p:cNvPr id="14" name="Rectangle 13">
+            <a:extLst>
+              <a:ext uri="{FF2B5EF4-FFF2-40B4-BE49-F238E27FC236}">
+                <a16:creationId xmlns:a16="http://schemas.microsoft.com/office/drawing/2014/main" id="{0D20B3ED-6B96-D462-B140-C596969A6095}"/>
+              </a:ext>
+            </a:extLst>
+          </p:cNvPr>
+          <p:cNvSpPr/>
+          <p:nvPr/>
+        </p:nvSpPr>
+        <p:spPr bwMode="auto">
+          <a:xfrm>
+            <a:off x="6482628" y="5862097"/>
+            <a:ext cx="2331217" cy="395426"/>
+          </a:xfrm>
+          <a:prstGeom prst="rect">
+            <a:avLst/>
+          </a:prstGeom>
+          <a:ln>
+            <a:headEnd type="none" w="med" len="med"/>
+            <a:tailEnd type="none" w="med" len="med"/>
+          </a:ln>
+        </p:spPr>
+        <p:style>
+          <a:lnRef idx="2">
+            <a:schemeClr val="accent6"/>
+          </a:lnRef>
+          <a:fillRef idx="1">
+            <a:schemeClr val="lt1"/>
+          </a:fillRef>
+          <a:effectRef idx="0">
+            <a:schemeClr val="accent6"/>
+          </a:effectRef>
+          <a:fontRef idx="minor">
+            <a:schemeClr val="dk1"/>
+          </a:fontRef>
+        </p:style>
+        <p:txBody>
+          <a:bodyPr vert="horz" wrap="square" lIns="0" tIns="46637" rIns="0" bIns="46637" numCol="1" rtlCol="0" anchor="ctr" anchorCtr="0" compatLnSpc="1">
+            <a:prstTxWarp prst="textNoShape">
+              <a:avLst/>
+            </a:prstTxWarp>
+          </a:bodyPr>
+          <a:lstStyle/>
+          <a:p>
+            <a:pPr algn="ctr" defTabSz="932472" fontAlgn="base">
+              <a:spcBef>
+                <a:spcPct val="0"/>
+              </a:spcBef>
+              <a:spcAft>
+                <a:spcPct val="0"/>
+              </a:spcAft>
+            </a:pPr>
+            <a:r>
+              <a:rPr lang="en-US" sz="2000" dirty="0">
+                <a:solidFill>
+                  <a:schemeClr val="bg1"/>
+                </a:solidFill>
+              </a:rPr>
+              <a:t>AWS</a:t>
+            </a:r>
+          </a:p>
+        </p:txBody>
+      </p:sp>
+      <p:cxnSp>
+        <p:nvCxnSpPr>
+          <p:cNvPr id="16" name="Straight Arrow Connector 15">
+            <a:extLst>
+              <a:ext uri="{FF2B5EF4-FFF2-40B4-BE49-F238E27FC236}">
+                <a16:creationId xmlns:a16="http://schemas.microsoft.com/office/drawing/2014/main" id="{0FD75C84-2D91-5047-987B-2D9F8292CDC4}"/>
+              </a:ext>
+            </a:extLst>
+          </p:cNvPr>
+          <p:cNvCxnSpPr>
+            <a:cxnSpLocks/>
+            <a:stCxn id="6" idx="3"/>
+            <a:endCxn id="10" idx="1"/>
+          </p:cNvCxnSpPr>
+          <p:nvPr/>
+        </p:nvCxnSpPr>
+        <p:spPr>
+          <a:xfrm>
+            <a:off x="5395573" y="2777885"/>
+            <a:ext cx="1087056" cy="2337306"/>
+          </a:xfrm>
+          <a:prstGeom prst="straightConnector1">
+            <a:avLst/>
+          </a:prstGeom>
+          <a:ln>
+            <a:headEnd type="none"/>
+            <a:tailEnd type="triangle"/>
+          </a:ln>
+        </p:spPr>
+        <p:style>
+          <a:lnRef idx="1">
+            <a:schemeClr val="dk1"/>
+          </a:lnRef>
+          <a:fillRef idx="0">
+            <a:schemeClr val="dk1"/>
+          </a:fillRef>
+          <a:effectRef idx="0">
+            <a:schemeClr val="dk1"/>
+          </a:effectRef>
+          <a:fontRef idx="minor">
+            <a:schemeClr val="tx1"/>
+          </a:fontRef>
+        </p:style>
+      </p:cxnSp>
+      <p:cxnSp>
+        <p:nvCxnSpPr>
+          <p:cNvPr id="22" name="Straight Arrow Connector 21">
+            <a:extLst>
+              <a:ext uri="{FF2B5EF4-FFF2-40B4-BE49-F238E27FC236}">
+                <a16:creationId xmlns:a16="http://schemas.microsoft.com/office/drawing/2014/main" id="{57F0B89C-3D30-700B-81A2-E78C10B4D597}"/>
+              </a:ext>
+            </a:extLst>
+          </p:cNvPr>
+          <p:cNvCxnSpPr>
+            <a:cxnSpLocks/>
+            <a:stCxn id="6" idx="3"/>
+            <a:endCxn id="14" idx="1"/>
+          </p:cNvCxnSpPr>
+          <p:nvPr/>
+        </p:nvCxnSpPr>
+        <p:spPr>
+          <a:xfrm>
+            <a:off x="5395573" y="2777885"/>
+            <a:ext cx="1087055" cy="3281925"/>
           </a:xfrm>
           <a:prstGeom prst="straightConnector1">
             <a:avLst/>
@@ -10936,15 +11156,7 @@
           <a:p>
             <a:r>
               <a:rPr lang="en-US" dirty="0"/>
-              <a:t>Currently: no automatic support (although libraries like RabbitMQ .NET Client </a:t>
-            </a:r>
-            <a:r>
-              <a:rPr lang="en-US" i="1" dirty="0"/>
-              <a:t>could</a:t>
-            </a:r>
-            <a:r>
-              <a:rPr lang="en-US" dirty="0"/>
-              <a:t> make it automatic).</a:t>
+              <a:t>Currently: little automatic support (RabbitMQ does it; AWS/Azure SDKs not so much).</a:t>
             </a:r>
           </a:p>
           <a:p>
@@ -11159,7 +11371,7 @@
         <p:spPr>
           <a:xfrm>
             <a:off x="269239" y="1197322"/>
-            <a:ext cx="11653522" cy="3918637"/>
+            <a:ext cx="11653522" cy="4416337"/>
           </a:xfrm>
         </p:spPr>
         <p:txBody>
@@ -11227,18 +11439,47 @@
             </a:r>
           </a:p>
           <a:p>
-            <a:pPr marL="514350" indent="-514350">
-              <a:buFont typeface="Arial" panose="020B0604020202020204" pitchFamily="34" charset="0"/>
-              <a:buChar char="•"/>
-            </a:pPr>
+            <a:pPr marL="796926" lvl="1" indent="-457200">
+              <a:buFontTx/>
+              <a:buChar char="-"/>
+            </a:pPr>
+            <a:r>
+              <a:rPr lang="en-US" dirty="0">
+                <a:hlinkClick r:id="rId5"/>
+              </a:rPr>
+              <a:t>Adaptive tail sampling</a:t>
+            </a:r>
             <a:endParaRPr lang="en-US" dirty="0"/>
           </a:p>
           <a:p>
-            <a:pPr marL="514350" indent="-514350">
-              <a:buFont typeface="Arial" panose="020B0604020202020204" pitchFamily="34" charset="0"/>
-              <a:buChar char="•"/>
-            </a:pPr>
-            <a:endParaRPr lang="en-US" dirty="0"/>
+            <a:pPr marL="796926" lvl="1" indent="-457200">
+              <a:buFontTx/>
+              <a:buChar char="-"/>
+            </a:pPr>
+            <a:r>
+              <a:rPr lang="en-US" dirty="0"/>
+              <a:t>OTLP on-the-wire format to S3 for cold storage</a:t>
+            </a:r>
+          </a:p>
+          <a:p>
+            <a:pPr marL="796926" lvl="1" indent="-457200">
+              <a:buFontTx/>
+              <a:buChar char="-"/>
+            </a:pPr>
+            <a:r>
+              <a:rPr lang="en-US" dirty="0"/>
+              <a:t>Sampling on data sent to dashboards</a:t>
+            </a:r>
+          </a:p>
+          <a:p>
+            <a:pPr marL="796926" lvl="1" indent="-457200">
+              <a:buFontTx/>
+              <a:buChar char="-"/>
+            </a:pPr>
+            <a:r>
+              <a:rPr lang="en-US" dirty="0"/>
+              <a:t>Drop metrics not necessary for real-time alerting/dashboards</a:t>
+            </a:r>
           </a:p>
         </p:txBody>
       </p:sp>
@@ -11257,14 +11498,14 @@
           <p:nvPr/>
         </p:nvPicPr>
         <p:blipFill>
-          <a:blip r:embed="rId5"/>
+          <a:blip r:embed="rId6"/>
           <a:stretch>
             <a:fillRect/>
           </a:stretch>
         </p:blipFill>
         <p:spPr>
           <a:xfrm>
-            <a:off x="4548187" y="4184303"/>
+            <a:off x="8416803" y="536751"/>
             <a:ext cx="3095625" cy="1476375"/>
           </a:xfrm>
           <a:prstGeom prst="rect">
